--- a/lectures/2026_GNET749_Lecture6_Viz_ExpDesign.pptx
+++ b/lectures/2026_GNET749_Lecture6_Viz_ExpDesign.pptx
@@ -224,7 +224,7 @@
           <a:p>
             <a:fld id="{777B686F-F5FC-9642-A786-0E66DB798C84}" type="datetimeFigureOut">
               <a:rPr lang="en-US" smtClean="0"/>
-              <a:t>4/28/25</a:t>
+              <a:t>4/27/26</a:t>
             </a:fld>
             <a:endParaRPr lang="en-US"/>
           </a:p>
@@ -1190,7 +1190,7 @@
           <a:p>
             <a:fld id="{6224229C-D7A7-4143-B770-C99CE6BDDF62}" type="datetimeFigureOut">
               <a:rPr lang="en-US" smtClean="0"/>
-              <a:t>4/28/25</a:t>
+              <a:t>4/27/26</a:t>
             </a:fld>
             <a:endParaRPr lang="en-US"/>
           </a:p>
@@ -1388,7 +1388,7 @@
           <a:p>
             <a:fld id="{6224229C-D7A7-4143-B770-C99CE6BDDF62}" type="datetimeFigureOut">
               <a:rPr lang="en-US" smtClean="0"/>
-              <a:t>4/28/25</a:t>
+              <a:t>4/27/26</a:t>
             </a:fld>
             <a:endParaRPr lang="en-US"/>
           </a:p>
@@ -1596,7 +1596,7 @@
           <a:p>
             <a:fld id="{6224229C-D7A7-4143-B770-C99CE6BDDF62}" type="datetimeFigureOut">
               <a:rPr lang="en-US" smtClean="0"/>
-              <a:t>4/28/25</a:t>
+              <a:t>4/27/26</a:t>
             </a:fld>
             <a:endParaRPr lang="en-US"/>
           </a:p>
@@ -1794,7 +1794,7 @@
           <a:p>
             <a:fld id="{6224229C-D7A7-4143-B770-C99CE6BDDF62}" type="datetimeFigureOut">
               <a:rPr lang="en-US" smtClean="0"/>
-              <a:t>4/28/25</a:t>
+              <a:t>4/27/26</a:t>
             </a:fld>
             <a:endParaRPr lang="en-US"/>
           </a:p>
@@ -2069,7 +2069,7 @@
           <a:p>
             <a:fld id="{6224229C-D7A7-4143-B770-C99CE6BDDF62}" type="datetimeFigureOut">
               <a:rPr lang="en-US" smtClean="0"/>
-              <a:t>4/28/25</a:t>
+              <a:t>4/27/26</a:t>
             </a:fld>
             <a:endParaRPr lang="en-US"/>
           </a:p>
@@ -2334,7 +2334,7 @@
           <a:p>
             <a:fld id="{6224229C-D7A7-4143-B770-C99CE6BDDF62}" type="datetimeFigureOut">
               <a:rPr lang="en-US" smtClean="0"/>
-              <a:t>4/28/25</a:t>
+              <a:t>4/27/26</a:t>
             </a:fld>
             <a:endParaRPr lang="en-US"/>
           </a:p>
@@ -2746,7 +2746,7 @@
           <a:p>
             <a:fld id="{6224229C-D7A7-4143-B770-C99CE6BDDF62}" type="datetimeFigureOut">
               <a:rPr lang="en-US" smtClean="0"/>
-              <a:t>4/28/25</a:t>
+              <a:t>4/27/26</a:t>
             </a:fld>
             <a:endParaRPr lang="en-US"/>
           </a:p>
@@ -2887,7 +2887,7 @@
           <a:p>
             <a:fld id="{6224229C-D7A7-4143-B770-C99CE6BDDF62}" type="datetimeFigureOut">
               <a:rPr lang="en-US" smtClean="0"/>
-              <a:t>4/28/25</a:t>
+              <a:t>4/27/26</a:t>
             </a:fld>
             <a:endParaRPr lang="en-US"/>
           </a:p>
@@ -3000,7 +3000,7 @@
           <a:p>
             <a:fld id="{6224229C-D7A7-4143-B770-C99CE6BDDF62}" type="datetimeFigureOut">
               <a:rPr lang="en-US" smtClean="0"/>
-              <a:t>4/28/25</a:t>
+              <a:t>4/27/26</a:t>
             </a:fld>
             <a:endParaRPr lang="en-US"/>
           </a:p>
@@ -3311,7 +3311,7 @@
           <a:p>
             <a:fld id="{6224229C-D7A7-4143-B770-C99CE6BDDF62}" type="datetimeFigureOut">
               <a:rPr lang="en-US" smtClean="0"/>
-              <a:t>4/28/25</a:t>
+              <a:t>4/27/26</a:t>
             </a:fld>
             <a:endParaRPr lang="en-US"/>
           </a:p>
@@ -3599,7 +3599,7 @@
           <a:p>
             <a:fld id="{6224229C-D7A7-4143-B770-C99CE6BDDF62}" type="datetimeFigureOut">
               <a:rPr lang="en-US" smtClean="0"/>
-              <a:t>4/28/25</a:t>
+              <a:t>4/27/26</a:t>
             </a:fld>
             <a:endParaRPr lang="en-US"/>
           </a:p>
@@ -3840,7 +3840,7 @@
           <a:p>
             <a:fld id="{6224229C-D7A7-4143-B770-C99CE6BDDF62}" type="datetimeFigureOut">
               <a:rPr lang="en-US" smtClean="0"/>
-              <a:t>4/28/25</a:t>
+              <a:t>4/27/26</a:t>
             </a:fld>
             <a:endParaRPr lang="en-US"/>
           </a:p>
@@ -4341,7 +4341,7 @@
           </a:ln>
           <a:extLst>
             <a:ext uri="{C572A759-6A51-4108-AA02-DFA0A04FC94B}">
-              <ma14:wrappingTextBoxFlag xmlns="" xmlns:m="http://schemas.openxmlformats.org/officeDocument/2006/math" xmlns:a14="http://schemas.microsoft.com/office/drawing/2010/main" xmlns:ma14="http://schemas.microsoft.com/office/mac/drawingml/2011/main" val="1"/>
+              <ma14:wrappingTextBoxFlag xmlns:ma14="http://schemas.microsoft.com/office/mac/drawingml/2011/main" xmlns:a14="http://schemas.microsoft.com/office/drawing/2010/main" xmlns:m="http://schemas.openxmlformats.org/officeDocument/2006/math" xmlns="" val="1"/>
             </a:ext>
           </a:extLst>
         </p:spPr>
@@ -4381,7 +4381,7 @@
           </a:ln>
           <a:extLst>
             <a:ext uri="{C572A759-6A51-4108-AA02-DFA0A04FC94B}">
-              <ma14:wrappingTextBoxFlag xmlns="" xmlns:m="http://schemas.openxmlformats.org/officeDocument/2006/math" xmlns:a14="http://schemas.microsoft.com/office/drawing/2010/main" xmlns:ma14="http://schemas.microsoft.com/office/mac/drawingml/2011/main" val="1"/>
+              <ma14:wrappingTextBoxFlag xmlns:ma14="http://schemas.microsoft.com/office/mac/drawingml/2011/main" xmlns:a14="http://schemas.microsoft.com/office/drawing/2010/main" xmlns:m="http://schemas.openxmlformats.org/officeDocument/2006/math" xmlns="" val="1"/>
             </a:ext>
           </a:extLst>
         </p:spPr>
@@ -4537,7 +4537,7 @@
           </a:ln>
           <a:extLst>
             <a:ext uri="{C572A759-6A51-4108-AA02-DFA0A04FC94B}">
-              <ma14:wrappingTextBoxFlag xmlns="" xmlns:m="http://schemas.openxmlformats.org/officeDocument/2006/math" xmlns:a14="http://schemas.microsoft.com/office/drawing/2010/main" xmlns:ma14="http://schemas.microsoft.com/office/mac/drawingml/2011/main" val="1"/>
+              <ma14:wrappingTextBoxFlag xmlns:ma14="http://schemas.microsoft.com/office/mac/drawingml/2011/main" xmlns:a14="http://schemas.microsoft.com/office/drawing/2010/main" xmlns:m="http://schemas.openxmlformats.org/officeDocument/2006/math" xmlns="" val="1"/>
             </a:ext>
           </a:extLst>
         </p:spPr>
@@ -4573,7 +4573,7 @@
           </a:ln>
           <a:extLst>
             <a:ext uri="{C572A759-6A51-4108-AA02-DFA0A04FC94B}">
-              <ma14:wrappingTextBoxFlag xmlns="" xmlns:m="http://schemas.openxmlformats.org/officeDocument/2006/math" xmlns:a14="http://schemas.microsoft.com/office/drawing/2010/main" xmlns:ma14="http://schemas.microsoft.com/office/mac/drawingml/2011/main" val="1"/>
+              <ma14:wrappingTextBoxFlag xmlns:ma14="http://schemas.microsoft.com/office/mac/drawingml/2011/main" xmlns:a14="http://schemas.microsoft.com/office/drawing/2010/main" xmlns:m="http://schemas.openxmlformats.org/officeDocument/2006/math" xmlns="" val="1"/>
             </a:ext>
           </a:extLst>
         </p:spPr>
@@ -4609,7 +4609,7 @@
           </a:ln>
           <a:extLst>
             <a:ext uri="{C572A759-6A51-4108-AA02-DFA0A04FC94B}">
-              <ma14:wrappingTextBoxFlag xmlns="" xmlns:m="http://schemas.openxmlformats.org/officeDocument/2006/math" xmlns:a14="http://schemas.microsoft.com/office/drawing/2010/main" xmlns:ma14="http://schemas.microsoft.com/office/mac/drawingml/2011/main" val="1"/>
+              <ma14:wrappingTextBoxFlag xmlns:ma14="http://schemas.microsoft.com/office/mac/drawingml/2011/main" xmlns:a14="http://schemas.microsoft.com/office/drawing/2010/main" xmlns:m="http://schemas.openxmlformats.org/officeDocument/2006/math" xmlns="" val="1"/>
             </a:ext>
           </a:extLst>
         </p:spPr>
@@ -4645,7 +4645,7 @@
           </a:ln>
           <a:extLst>
             <a:ext uri="{C572A759-6A51-4108-AA02-DFA0A04FC94B}">
-              <ma14:wrappingTextBoxFlag xmlns="" xmlns:m="http://schemas.openxmlformats.org/officeDocument/2006/math" xmlns:a14="http://schemas.microsoft.com/office/drawing/2010/main" xmlns:ma14="http://schemas.microsoft.com/office/mac/drawingml/2011/main" val="1"/>
+              <ma14:wrappingTextBoxFlag xmlns:ma14="http://schemas.microsoft.com/office/mac/drawingml/2011/main" xmlns:a14="http://schemas.microsoft.com/office/drawing/2010/main" xmlns:m="http://schemas.openxmlformats.org/officeDocument/2006/math" xmlns="" val="1"/>
             </a:ext>
           </a:extLst>
         </p:spPr>
@@ -4681,7 +4681,7 @@
           </a:ln>
           <a:extLst>
             <a:ext uri="{C572A759-6A51-4108-AA02-DFA0A04FC94B}">
-              <ma14:wrappingTextBoxFlag xmlns="" xmlns:m="http://schemas.openxmlformats.org/officeDocument/2006/math" xmlns:a14="http://schemas.microsoft.com/office/drawing/2010/main" xmlns:ma14="http://schemas.microsoft.com/office/mac/drawingml/2011/main" val="1"/>
+              <ma14:wrappingTextBoxFlag xmlns:ma14="http://schemas.microsoft.com/office/mac/drawingml/2011/main" xmlns:a14="http://schemas.microsoft.com/office/drawing/2010/main" xmlns:m="http://schemas.openxmlformats.org/officeDocument/2006/math" xmlns="" val="1"/>
             </a:ext>
           </a:extLst>
         </p:spPr>
@@ -4748,7 +4748,7 @@
           </a:ln>
           <a:extLst>
             <a:ext uri="{C572A759-6A51-4108-AA02-DFA0A04FC94B}">
-              <ma14:wrappingTextBoxFlag xmlns="" xmlns:m="http://schemas.openxmlformats.org/officeDocument/2006/math" xmlns:a14="http://schemas.microsoft.com/office/drawing/2010/main" xmlns:ma14="http://schemas.microsoft.com/office/mac/drawingml/2011/main" val="1"/>
+              <ma14:wrappingTextBoxFlag xmlns:ma14="http://schemas.microsoft.com/office/mac/drawingml/2011/main" xmlns:a14="http://schemas.microsoft.com/office/drawing/2010/main" xmlns:m="http://schemas.openxmlformats.org/officeDocument/2006/math" xmlns="" val="1"/>
             </a:ext>
           </a:extLst>
         </p:spPr>
@@ -4933,7 +4933,7 @@
           </a:ln>
           <a:extLst>
             <a:ext uri="{C572A759-6A51-4108-AA02-DFA0A04FC94B}">
-              <ma14:wrappingTextBoxFlag xmlns="" xmlns:m="http://schemas.openxmlformats.org/officeDocument/2006/math" xmlns:a14="http://schemas.microsoft.com/office/drawing/2010/main" xmlns:ma14="http://schemas.microsoft.com/office/mac/drawingml/2011/main" val="1"/>
+              <ma14:wrappingTextBoxFlag xmlns:ma14="http://schemas.microsoft.com/office/mac/drawingml/2011/main" xmlns:a14="http://schemas.microsoft.com/office/drawing/2010/main" xmlns:m="http://schemas.openxmlformats.org/officeDocument/2006/math" xmlns="" val="1"/>
             </a:ext>
           </a:extLst>
         </p:spPr>
@@ -4974,7 +4974,7 @@
           </a:ln>
           <a:extLst>
             <a:ext uri="{C572A759-6A51-4108-AA02-DFA0A04FC94B}">
-              <ma14:wrappingTextBoxFlag xmlns="" xmlns:m="http://schemas.openxmlformats.org/officeDocument/2006/math" xmlns:a14="http://schemas.microsoft.com/office/drawing/2010/main" xmlns:ma14="http://schemas.microsoft.com/office/mac/drawingml/2011/main" val="1"/>
+              <ma14:wrappingTextBoxFlag xmlns:ma14="http://schemas.microsoft.com/office/mac/drawingml/2011/main" xmlns:a14="http://schemas.microsoft.com/office/drawing/2010/main" xmlns:m="http://schemas.openxmlformats.org/officeDocument/2006/math" xmlns="" val="1"/>
             </a:ext>
           </a:extLst>
         </p:spPr>
@@ -5130,7 +5130,7 @@
           </a:ln>
           <a:extLst>
             <a:ext uri="{C572A759-6A51-4108-AA02-DFA0A04FC94B}">
-              <ma14:wrappingTextBoxFlag xmlns="" xmlns:m="http://schemas.openxmlformats.org/officeDocument/2006/math" xmlns:a14="http://schemas.microsoft.com/office/drawing/2010/main" xmlns:ma14="http://schemas.microsoft.com/office/mac/drawingml/2011/main" val="1"/>
+              <ma14:wrappingTextBoxFlag xmlns:ma14="http://schemas.microsoft.com/office/mac/drawingml/2011/main" xmlns:a14="http://schemas.microsoft.com/office/drawing/2010/main" xmlns:m="http://schemas.openxmlformats.org/officeDocument/2006/math" xmlns="" val="1"/>
             </a:ext>
           </a:extLst>
         </p:spPr>
@@ -5166,7 +5166,7 @@
           </a:ln>
           <a:extLst>
             <a:ext uri="{C572A759-6A51-4108-AA02-DFA0A04FC94B}">
-              <ma14:wrappingTextBoxFlag xmlns="" xmlns:m="http://schemas.openxmlformats.org/officeDocument/2006/math" xmlns:a14="http://schemas.microsoft.com/office/drawing/2010/main" xmlns:ma14="http://schemas.microsoft.com/office/mac/drawingml/2011/main" val="1"/>
+              <ma14:wrappingTextBoxFlag xmlns:ma14="http://schemas.microsoft.com/office/mac/drawingml/2011/main" xmlns:a14="http://schemas.microsoft.com/office/drawing/2010/main" xmlns:m="http://schemas.openxmlformats.org/officeDocument/2006/math" xmlns="" val="1"/>
             </a:ext>
           </a:extLst>
         </p:spPr>
@@ -5202,7 +5202,7 @@
           </a:ln>
           <a:extLst>
             <a:ext uri="{C572A759-6A51-4108-AA02-DFA0A04FC94B}">
-              <ma14:wrappingTextBoxFlag xmlns="" xmlns:m="http://schemas.openxmlformats.org/officeDocument/2006/math" xmlns:a14="http://schemas.microsoft.com/office/drawing/2010/main" xmlns:ma14="http://schemas.microsoft.com/office/mac/drawingml/2011/main" val="1"/>
+              <ma14:wrappingTextBoxFlag xmlns:ma14="http://schemas.microsoft.com/office/mac/drawingml/2011/main" xmlns:a14="http://schemas.microsoft.com/office/drawing/2010/main" xmlns:m="http://schemas.openxmlformats.org/officeDocument/2006/math" xmlns="" val="1"/>
             </a:ext>
           </a:extLst>
         </p:spPr>
@@ -5238,7 +5238,7 @@
           </a:ln>
           <a:extLst>
             <a:ext uri="{C572A759-6A51-4108-AA02-DFA0A04FC94B}">
-              <ma14:wrappingTextBoxFlag xmlns="" xmlns:m="http://schemas.openxmlformats.org/officeDocument/2006/math" xmlns:a14="http://schemas.microsoft.com/office/drawing/2010/main" xmlns:ma14="http://schemas.microsoft.com/office/mac/drawingml/2011/main" val="1"/>
+              <ma14:wrappingTextBoxFlag xmlns:ma14="http://schemas.microsoft.com/office/mac/drawingml/2011/main" xmlns:a14="http://schemas.microsoft.com/office/drawing/2010/main" xmlns:m="http://schemas.openxmlformats.org/officeDocument/2006/math" xmlns="" val="1"/>
             </a:ext>
           </a:extLst>
         </p:spPr>
@@ -5274,7 +5274,7 @@
           </a:ln>
           <a:extLst>
             <a:ext uri="{C572A759-6A51-4108-AA02-DFA0A04FC94B}">
-              <ma14:wrappingTextBoxFlag xmlns="" xmlns:m="http://schemas.openxmlformats.org/officeDocument/2006/math" xmlns:a14="http://schemas.microsoft.com/office/drawing/2010/main" xmlns:ma14="http://schemas.microsoft.com/office/mac/drawingml/2011/main" val="1"/>
+              <ma14:wrappingTextBoxFlag xmlns:ma14="http://schemas.microsoft.com/office/mac/drawingml/2011/main" xmlns:a14="http://schemas.microsoft.com/office/drawing/2010/main" xmlns:m="http://schemas.openxmlformats.org/officeDocument/2006/math" xmlns="" val="1"/>
             </a:ext>
           </a:extLst>
         </p:spPr>
@@ -5323,7 +5323,7 @@
           </a:ln>
           <a:extLst>
             <a:ext uri="{C572A759-6A51-4108-AA02-DFA0A04FC94B}">
-              <ma14:wrappingTextBoxFlag xmlns="" xmlns:m="http://schemas.openxmlformats.org/officeDocument/2006/math" xmlns:a14="http://schemas.microsoft.com/office/drawing/2010/main" xmlns:ma14="http://schemas.microsoft.com/office/mac/drawingml/2011/main" val="1"/>
+              <ma14:wrappingTextBoxFlag xmlns:ma14="http://schemas.microsoft.com/office/mac/drawingml/2011/main" xmlns:a14="http://schemas.microsoft.com/office/drawing/2010/main" xmlns:m="http://schemas.openxmlformats.org/officeDocument/2006/math" xmlns="" val="1"/>
             </a:ext>
           </a:extLst>
         </p:spPr>
@@ -5364,7 +5364,7 @@
           </a:ln>
           <a:extLst>
             <a:ext uri="{C572A759-6A51-4108-AA02-DFA0A04FC94B}">
-              <ma14:wrappingTextBoxFlag xmlns="" xmlns:m="http://schemas.openxmlformats.org/officeDocument/2006/math" xmlns:a14="http://schemas.microsoft.com/office/drawing/2010/main" xmlns:ma14="http://schemas.microsoft.com/office/mac/drawingml/2011/main" val="1"/>
+              <ma14:wrappingTextBoxFlag xmlns:ma14="http://schemas.microsoft.com/office/mac/drawingml/2011/main" xmlns:a14="http://schemas.microsoft.com/office/drawing/2010/main" xmlns:m="http://schemas.openxmlformats.org/officeDocument/2006/math" xmlns="" val="1"/>
             </a:ext>
           </a:extLst>
         </p:spPr>
@@ -5404,7 +5404,7 @@
           </a:ln>
           <a:extLst>
             <a:ext uri="{C572A759-6A51-4108-AA02-DFA0A04FC94B}">
-              <ma14:wrappingTextBoxFlag xmlns="" xmlns:m="http://schemas.openxmlformats.org/officeDocument/2006/math" xmlns:a14="http://schemas.microsoft.com/office/drawing/2010/main" xmlns:ma14="http://schemas.microsoft.com/office/mac/drawingml/2011/main" val="1"/>
+              <ma14:wrappingTextBoxFlag xmlns:ma14="http://schemas.microsoft.com/office/mac/drawingml/2011/main" xmlns:a14="http://schemas.microsoft.com/office/drawing/2010/main" xmlns:m="http://schemas.openxmlformats.org/officeDocument/2006/math" xmlns="" val="1"/>
             </a:ext>
           </a:extLst>
         </p:spPr>
@@ -5556,7 +5556,7 @@
           </a:ln>
           <a:extLst>
             <a:ext uri="{C572A759-6A51-4108-AA02-DFA0A04FC94B}">
-              <ma14:wrappingTextBoxFlag xmlns:ma14="http://schemas.microsoft.com/office/mac/drawingml/2011/main" xmlns:a14="http://schemas.microsoft.com/office/drawing/2010/main" xmlns:m="http://schemas.openxmlformats.org/officeDocument/2006/math" xmlns="" val="1"/>
+              <ma14:wrappingTextBoxFlag xmlns="" xmlns:m="http://schemas.openxmlformats.org/officeDocument/2006/math" xmlns:a14="http://schemas.microsoft.com/office/drawing/2010/main" xmlns:ma14="http://schemas.microsoft.com/office/mac/drawingml/2011/main" val="1"/>
             </a:ext>
           </a:extLst>
         </p:spPr>
@@ -5597,7 +5597,7 @@
           </a:ln>
           <a:extLst>
             <a:ext uri="{C572A759-6A51-4108-AA02-DFA0A04FC94B}">
-              <ma14:wrappingTextBoxFlag xmlns:ma14="http://schemas.microsoft.com/office/mac/drawingml/2011/main" xmlns:a14="http://schemas.microsoft.com/office/drawing/2010/main" xmlns:m="http://schemas.openxmlformats.org/officeDocument/2006/math" xmlns="" val="1"/>
+              <ma14:wrappingTextBoxFlag xmlns="" xmlns:m="http://schemas.openxmlformats.org/officeDocument/2006/math" xmlns:a14="http://schemas.microsoft.com/office/drawing/2010/main" xmlns:ma14="http://schemas.microsoft.com/office/mac/drawingml/2011/main" val="1"/>
             </a:ext>
           </a:extLst>
         </p:spPr>
@@ -5753,7 +5753,7 @@
           </a:ln>
           <a:extLst>
             <a:ext uri="{C572A759-6A51-4108-AA02-DFA0A04FC94B}">
-              <ma14:wrappingTextBoxFlag xmlns:ma14="http://schemas.microsoft.com/office/mac/drawingml/2011/main" xmlns:a14="http://schemas.microsoft.com/office/drawing/2010/main" xmlns:m="http://schemas.openxmlformats.org/officeDocument/2006/math" xmlns="" val="1"/>
+              <ma14:wrappingTextBoxFlag xmlns="" xmlns:m="http://schemas.openxmlformats.org/officeDocument/2006/math" xmlns:a14="http://schemas.microsoft.com/office/drawing/2010/main" xmlns:ma14="http://schemas.microsoft.com/office/mac/drawingml/2011/main" val="1"/>
             </a:ext>
           </a:extLst>
         </p:spPr>
@@ -5789,7 +5789,7 @@
           </a:ln>
           <a:extLst>
             <a:ext uri="{C572A759-6A51-4108-AA02-DFA0A04FC94B}">
-              <ma14:wrappingTextBoxFlag xmlns:ma14="http://schemas.microsoft.com/office/mac/drawingml/2011/main" xmlns:a14="http://schemas.microsoft.com/office/drawing/2010/main" xmlns:m="http://schemas.openxmlformats.org/officeDocument/2006/math" xmlns="" val="1"/>
+              <ma14:wrappingTextBoxFlag xmlns="" xmlns:m="http://schemas.openxmlformats.org/officeDocument/2006/math" xmlns:a14="http://schemas.microsoft.com/office/drawing/2010/main" xmlns:ma14="http://schemas.microsoft.com/office/mac/drawingml/2011/main" val="1"/>
             </a:ext>
           </a:extLst>
         </p:spPr>
@@ -5825,7 +5825,7 @@
           </a:ln>
           <a:extLst>
             <a:ext uri="{C572A759-6A51-4108-AA02-DFA0A04FC94B}">
-              <ma14:wrappingTextBoxFlag xmlns:ma14="http://schemas.microsoft.com/office/mac/drawingml/2011/main" xmlns:a14="http://schemas.microsoft.com/office/drawing/2010/main" xmlns:m="http://schemas.openxmlformats.org/officeDocument/2006/math" xmlns="" val="1"/>
+              <ma14:wrappingTextBoxFlag xmlns="" xmlns:m="http://schemas.openxmlformats.org/officeDocument/2006/math" xmlns:a14="http://schemas.microsoft.com/office/drawing/2010/main" xmlns:ma14="http://schemas.microsoft.com/office/mac/drawingml/2011/main" val="1"/>
             </a:ext>
           </a:extLst>
         </p:spPr>
@@ -5861,7 +5861,7 @@
           </a:ln>
           <a:extLst>
             <a:ext uri="{C572A759-6A51-4108-AA02-DFA0A04FC94B}">
-              <ma14:wrappingTextBoxFlag xmlns:ma14="http://schemas.microsoft.com/office/mac/drawingml/2011/main" xmlns:a14="http://schemas.microsoft.com/office/drawing/2010/main" xmlns:m="http://schemas.openxmlformats.org/officeDocument/2006/math" xmlns="" val="1"/>
+              <ma14:wrappingTextBoxFlag xmlns="" xmlns:m="http://schemas.openxmlformats.org/officeDocument/2006/math" xmlns:a14="http://schemas.microsoft.com/office/drawing/2010/main" xmlns:ma14="http://schemas.microsoft.com/office/mac/drawingml/2011/main" val="1"/>
             </a:ext>
           </a:extLst>
         </p:spPr>
@@ -5897,7 +5897,7 @@
           </a:ln>
           <a:extLst>
             <a:ext uri="{C572A759-6A51-4108-AA02-DFA0A04FC94B}">
-              <ma14:wrappingTextBoxFlag xmlns:ma14="http://schemas.microsoft.com/office/mac/drawingml/2011/main" xmlns:a14="http://schemas.microsoft.com/office/drawing/2010/main" xmlns:m="http://schemas.openxmlformats.org/officeDocument/2006/math" xmlns="" val="1"/>
+              <ma14:wrappingTextBoxFlag xmlns="" xmlns:m="http://schemas.openxmlformats.org/officeDocument/2006/math" xmlns:a14="http://schemas.microsoft.com/office/drawing/2010/main" xmlns:ma14="http://schemas.microsoft.com/office/mac/drawingml/2011/main" val="1"/>
             </a:ext>
           </a:extLst>
         </p:spPr>
@@ -5946,7 +5946,7 @@
           </a:ln>
           <a:extLst>
             <a:ext uri="{C572A759-6A51-4108-AA02-DFA0A04FC94B}">
-              <ma14:wrappingTextBoxFlag xmlns:ma14="http://schemas.microsoft.com/office/mac/drawingml/2011/main" xmlns:a14="http://schemas.microsoft.com/office/drawing/2010/main" xmlns:m="http://schemas.openxmlformats.org/officeDocument/2006/math" xmlns="" val="1"/>
+              <ma14:wrappingTextBoxFlag xmlns="" xmlns:m="http://schemas.openxmlformats.org/officeDocument/2006/math" xmlns:a14="http://schemas.microsoft.com/office/drawing/2010/main" xmlns:ma14="http://schemas.microsoft.com/office/mac/drawingml/2011/main" val="1"/>
             </a:ext>
           </a:extLst>
         </p:spPr>
@@ -5986,7 +5986,7 @@
           </a:ln>
           <a:extLst>
             <a:ext uri="{C572A759-6A51-4108-AA02-DFA0A04FC94B}">
-              <ma14:wrappingTextBoxFlag xmlns:ma14="http://schemas.microsoft.com/office/mac/drawingml/2011/main" xmlns:a14="http://schemas.microsoft.com/office/drawing/2010/main" xmlns:m="http://schemas.openxmlformats.org/officeDocument/2006/math" xmlns="" val="1"/>
+              <ma14:wrappingTextBoxFlag xmlns="" xmlns:m="http://schemas.openxmlformats.org/officeDocument/2006/math" xmlns:a14="http://schemas.microsoft.com/office/drawing/2010/main" xmlns:ma14="http://schemas.microsoft.com/office/mac/drawingml/2011/main" val="1"/>
             </a:ext>
           </a:extLst>
         </p:spPr>
@@ -6197,15 +6197,7 @@
           <a:p>
             <a:r>
               <a:rPr lang="en-US" dirty="0"/>
-              <a:t>You may want the LRT style analysis to find genes </a:t>
-            </a:r>
-            <a:r>
-              <a:rPr lang="en-US" dirty="0" err="1"/>
-              <a:t>chaning</a:t>
-            </a:r>
-            <a:r>
-              <a:rPr lang="en-US" dirty="0"/>
-              <a:t> in complicated experimental designs </a:t>
+              <a:t>You may want the LRT style analysis to find genes changing in complicated experimental designs </a:t>
             </a:r>
           </a:p>
         </p:txBody>
@@ -6284,7 +6276,7 @@
         </p:nvSpPr>
         <p:spPr>
           <a:xfrm>
-            <a:off x="3541986" y="1178090"/>
+            <a:off x="3385575" y="1234702"/>
             <a:ext cx="4357540" cy="882293"/>
           </a:xfrm>
           <a:prstGeom prst="rect">
@@ -6295,7 +6287,7 @@
           </a:ln>
           <a:extLst>
             <a:ext uri="{C572A759-6A51-4108-AA02-DFA0A04FC94B}">
-              <ma14:wrappingTextBoxFlag xmlns="" xmlns:m="http://schemas.openxmlformats.org/officeDocument/2006/math" xmlns:a14="http://schemas.microsoft.com/office/drawing/2010/main" xmlns:ma14="http://schemas.microsoft.com/office/mac/drawingml/2011/main" val="1"/>
+              <ma14:wrappingTextBoxFlag xmlns:ma14="http://schemas.microsoft.com/office/mac/drawingml/2011/main" xmlns:a14="http://schemas.microsoft.com/office/drawing/2010/main" xmlns:m="http://schemas.openxmlformats.org/officeDocument/2006/math" xmlns="" val="1"/>
             </a:ext>
           </a:extLst>
         </p:spPr>
@@ -6469,7 +6461,7 @@
           </a:ln>
           <a:extLst>
             <a:ext uri="{C572A759-6A51-4108-AA02-DFA0A04FC94B}">
-              <ma14:wrappingTextBoxFlag xmlns="" xmlns:m="http://schemas.openxmlformats.org/officeDocument/2006/math" xmlns:a14="http://schemas.microsoft.com/office/drawing/2010/main" xmlns:ma14="http://schemas.microsoft.com/office/mac/drawingml/2011/main" val="1"/>
+              <ma14:wrappingTextBoxFlag xmlns:ma14="http://schemas.microsoft.com/office/mac/drawingml/2011/main" xmlns:a14="http://schemas.microsoft.com/office/drawing/2010/main" xmlns:m="http://schemas.openxmlformats.org/officeDocument/2006/math" xmlns="" val="1"/>
             </a:ext>
           </a:extLst>
         </p:spPr>
@@ -6561,7 +6553,7 @@
           </a:ln>
           <a:extLst>
             <a:ext uri="{C572A759-6A51-4108-AA02-DFA0A04FC94B}">
-              <ma14:wrappingTextBoxFlag xmlns="" xmlns:m="http://schemas.openxmlformats.org/officeDocument/2006/math" xmlns:a14="http://schemas.microsoft.com/office/drawing/2010/main" xmlns:ma14="http://schemas.microsoft.com/office/mac/drawingml/2011/main" val="1"/>
+              <ma14:wrappingTextBoxFlag xmlns:ma14="http://schemas.microsoft.com/office/mac/drawingml/2011/main" xmlns:a14="http://schemas.microsoft.com/office/drawing/2010/main" xmlns:m="http://schemas.openxmlformats.org/officeDocument/2006/math" xmlns="" val="1"/>
             </a:ext>
           </a:extLst>
         </p:spPr>
@@ -6707,7 +6699,7 @@
           </a:ln>
           <a:extLst>
             <a:ext uri="{C572A759-6A51-4108-AA02-DFA0A04FC94B}">
-              <ma14:wrappingTextBoxFlag xmlns="" xmlns:m="http://schemas.openxmlformats.org/officeDocument/2006/math" xmlns:a14="http://schemas.microsoft.com/office/drawing/2010/main" xmlns:ma14="http://schemas.microsoft.com/office/mac/drawingml/2011/main" val="1"/>
+              <ma14:wrappingTextBoxFlag xmlns:ma14="http://schemas.microsoft.com/office/mac/drawingml/2011/main" xmlns:a14="http://schemas.microsoft.com/office/drawing/2010/main" xmlns:m="http://schemas.openxmlformats.org/officeDocument/2006/math" xmlns="" val="1"/>
             </a:ext>
           </a:extLst>
         </p:spPr>
@@ -6774,7 +6766,7 @@
           </a:ln>
           <a:extLst>
             <a:ext uri="{C572A759-6A51-4108-AA02-DFA0A04FC94B}">
-              <ma14:wrappingTextBoxFlag xmlns="" xmlns:m="http://schemas.openxmlformats.org/officeDocument/2006/math" xmlns:a14="http://schemas.microsoft.com/office/drawing/2010/main" xmlns:ma14="http://schemas.microsoft.com/office/mac/drawingml/2011/main" val="1"/>
+              <ma14:wrappingTextBoxFlag xmlns:ma14="http://schemas.microsoft.com/office/mac/drawingml/2011/main" xmlns:a14="http://schemas.microsoft.com/office/drawing/2010/main" xmlns:m="http://schemas.openxmlformats.org/officeDocument/2006/math" xmlns="" val="1"/>
             </a:ext>
           </a:extLst>
         </p:spPr>
@@ -6814,7 +6806,7 @@
           </a:ln>
           <a:extLst>
             <a:ext uri="{C572A759-6A51-4108-AA02-DFA0A04FC94B}">
-              <ma14:wrappingTextBoxFlag xmlns="" xmlns:m="http://schemas.openxmlformats.org/officeDocument/2006/math" xmlns:a14="http://schemas.microsoft.com/office/drawing/2010/main" xmlns:ma14="http://schemas.microsoft.com/office/mac/drawingml/2011/main" val="1"/>
+              <ma14:wrappingTextBoxFlag xmlns:ma14="http://schemas.microsoft.com/office/mac/drawingml/2011/main" xmlns:a14="http://schemas.microsoft.com/office/drawing/2010/main" xmlns:m="http://schemas.openxmlformats.org/officeDocument/2006/math" xmlns="" val="1"/>
             </a:ext>
           </a:extLst>
         </p:spPr>
@@ -6879,7 +6871,7 @@
           </a:ln>
           <a:extLst>
             <a:ext uri="{C572A759-6A51-4108-AA02-DFA0A04FC94B}">
-              <ma14:wrappingTextBoxFlag xmlns="" xmlns:m="http://schemas.openxmlformats.org/officeDocument/2006/math" xmlns:a14="http://schemas.microsoft.com/office/drawing/2010/main" xmlns:ma14="http://schemas.microsoft.com/office/mac/drawingml/2011/main" val="1"/>
+              <ma14:wrappingTextBoxFlag xmlns:ma14="http://schemas.microsoft.com/office/mac/drawingml/2011/main" xmlns:a14="http://schemas.microsoft.com/office/drawing/2010/main" xmlns:m="http://schemas.openxmlformats.org/officeDocument/2006/math" xmlns="" val="1"/>
             </a:ext>
           </a:extLst>
         </p:spPr>
@@ -6919,7 +6911,7 @@
           </a:ln>
           <a:extLst>
             <a:ext uri="{C572A759-6A51-4108-AA02-DFA0A04FC94B}">
-              <ma14:wrappingTextBoxFlag xmlns="" xmlns:m="http://schemas.openxmlformats.org/officeDocument/2006/math" xmlns:a14="http://schemas.microsoft.com/office/drawing/2010/main" xmlns:ma14="http://schemas.microsoft.com/office/mac/drawingml/2011/main" val="1"/>
+              <ma14:wrappingTextBoxFlag xmlns:ma14="http://schemas.microsoft.com/office/mac/drawingml/2011/main" xmlns:a14="http://schemas.microsoft.com/office/drawing/2010/main" xmlns:m="http://schemas.openxmlformats.org/officeDocument/2006/math" xmlns="" val="1"/>
             </a:ext>
           </a:extLst>
         </p:spPr>
@@ -7013,7 +7005,7 @@
           </a:ln>
           <a:extLst>
             <a:ext uri="{C572A759-6A51-4108-AA02-DFA0A04FC94B}">
-              <ma14:wrappingTextBoxFlag xmlns="" xmlns:m="http://schemas.openxmlformats.org/officeDocument/2006/math" xmlns:a14="http://schemas.microsoft.com/office/drawing/2010/main" xmlns:ma14="http://schemas.microsoft.com/office/mac/drawingml/2011/main" val="1"/>
+              <ma14:wrappingTextBoxFlag xmlns:ma14="http://schemas.microsoft.com/office/mac/drawingml/2011/main" xmlns:a14="http://schemas.microsoft.com/office/drawing/2010/main" xmlns:m="http://schemas.openxmlformats.org/officeDocument/2006/math" xmlns="" val="1"/>
             </a:ext>
           </a:extLst>
         </p:spPr>
@@ -7078,7 +7070,7 @@
           </a:ln>
           <a:extLst>
             <a:ext uri="{C572A759-6A51-4108-AA02-DFA0A04FC94B}">
-              <ma14:wrappingTextBoxFlag xmlns="" xmlns:m="http://schemas.openxmlformats.org/officeDocument/2006/math" xmlns:a14="http://schemas.microsoft.com/office/drawing/2010/main" xmlns:ma14="http://schemas.microsoft.com/office/mac/drawingml/2011/main" val="1"/>
+              <ma14:wrappingTextBoxFlag xmlns:ma14="http://schemas.microsoft.com/office/mac/drawingml/2011/main" xmlns:a14="http://schemas.microsoft.com/office/drawing/2010/main" xmlns:m="http://schemas.openxmlformats.org/officeDocument/2006/math" xmlns="" val="1"/>
             </a:ext>
           </a:extLst>
         </p:spPr>
@@ -7263,7 +7255,7 @@
           </a:ln>
           <a:extLst>
             <a:ext uri="{C572A759-6A51-4108-AA02-DFA0A04FC94B}">
-              <ma14:wrappingTextBoxFlag xmlns="" xmlns:m="http://schemas.openxmlformats.org/officeDocument/2006/math" xmlns:a14="http://schemas.microsoft.com/office/drawing/2010/main" xmlns:ma14="http://schemas.microsoft.com/office/mac/drawingml/2011/main" val="1"/>
+              <ma14:wrappingTextBoxFlag xmlns:ma14="http://schemas.microsoft.com/office/mac/drawingml/2011/main" xmlns:a14="http://schemas.microsoft.com/office/drawing/2010/main" xmlns:m="http://schemas.openxmlformats.org/officeDocument/2006/math" xmlns="" val="1"/>
             </a:ext>
           </a:extLst>
         </p:spPr>
@@ -7309,7 +7301,7 @@
           </a:ln>
           <a:extLst>
             <a:ext uri="{C572A759-6A51-4108-AA02-DFA0A04FC94B}">
-              <ma14:wrappingTextBoxFlag xmlns="" xmlns:m="http://schemas.openxmlformats.org/officeDocument/2006/math" xmlns:a14="http://schemas.microsoft.com/office/drawing/2010/main" xmlns:ma14="http://schemas.microsoft.com/office/mac/drawingml/2011/main" val="1"/>
+              <ma14:wrappingTextBoxFlag xmlns:ma14="http://schemas.microsoft.com/office/mac/drawingml/2011/main" xmlns:a14="http://schemas.microsoft.com/office/drawing/2010/main" xmlns:m="http://schemas.openxmlformats.org/officeDocument/2006/math" xmlns="" val="1"/>
             </a:ext>
           </a:extLst>
         </p:spPr>
@@ -7362,7 +7354,7 @@
           </a:ln>
           <a:extLst>
             <a:ext uri="{C572A759-6A51-4108-AA02-DFA0A04FC94B}">
-              <ma14:wrappingTextBoxFlag xmlns="" xmlns:m="http://schemas.openxmlformats.org/officeDocument/2006/math" xmlns:a14="http://schemas.microsoft.com/office/drawing/2010/main" xmlns:ma14="http://schemas.microsoft.com/office/mac/drawingml/2011/main" val="1"/>
+              <ma14:wrappingTextBoxFlag xmlns:ma14="http://schemas.microsoft.com/office/mac/drawingml/2011/main" xmlns:a14="http://schemas.microsoft.com/office/drawing/2010/main" xmlns:m="http://schemas.openxmlformats.org/officeDocument/2006/math" xmlns="" val="1"/>
             </a:ext>
           </a:extLst>
         </p:spPr>
@@ -7436,7 +7428,7 @@
           </a:ln>
           <a:extLst>
             <a:ext uri="{C572A759-6A51-4108-AA02-DFA0A04FC94B}">
-              <ma14:wrappingTextBoxFlag xmlns="" xmlns:m="http://schemas.openxmlformats.org/officeDocument/2006/math" xmlns:a14="http://schemas.microsoft.com/office/drawing/2010/main" xmlns:ma14="http://schemas.microsoft.com/office/mac/drawingml/2011/main" val="1"/>
+              <ma14:wrappingTextBoxFlag xmlns:ma14="http://schemas.microsoft.com/office/mac/drawingml/2011/main" xmlns:a14="http://schemas.microsoft.com/office/drawing/2010/main" xmlns:m="http://schemas.openxmlformats.org/officeDocument/2006/math" xmlns="" val="1"/>
             </a:ext>
           </a:extLst>
         </p:spPr>
@@ -7561,7 +7553,7 @@
           </a:ln>
           <a:extLst>
             <a:ext uri="{C572A759-6A51-4108-AA02-DFA0A04FC94B}">
-              <ma14:wrappingTextBoxFlag xmlns="" xmlns:m="http://schemas.openxmlformats.org/officeDocument/2006/math" xmlns:a14="http://schemas.microsoft.com/office/drawing/2010/main" xmlns:ma14="http://schemas.microsoft.com/office/mac/drawingml/2011/main" val="1"/>
+              <ma14:wrappingTextBoxFlag xmlns:ma14="http://schemas.microsoft.com/office/mac/drawingml/2011/main" xmlns:a14="http://schemas.microsoft.com/office/drawing/2010/main" xmlns:m="http://schemas.openxmlformats.org/officeDocument/2006/math" xmlns="" val="1"/>
             </a:ext>
           </a:extLst>
         </p:spPr>
@@ -8708,7 +8700,7 @@
           </a:ln>
           <a:extLst>
             <a:ext uri="{C572A759-6A51-4108-AA02-DFA0A04FC94B}">
-              <ma14:wrappingTextBoxFlag xmlns="" xmlns:m="http://schemas.openxmlformats.org/officeDocument/2006/math" xmlns:a14="http://schemas.microsoft.com/office/drawing/2010/main" xmlns:ma14="http://schemas.microsoft.com/office/mac/drawingml/2011/main" val="1"/>
+              <ma14:wrappingTextBoxFlag xmlns:ma14="http://schemas.microsoft.com/office/mac/drawingml/2011/main" xmlns:a14="http://schemas.microsoft.com/office/drawing/2010/main" xmlns:m="http://schemas.openxmlformats.org/officeDocument/2006/math" xmlns="" val="1"/>
             </a:ext>
           </a:extLst>
         </p:spPr>
@@ -8936,7 +8928,7 @@
           </a:ln>
           <a:extLst>
             <a:ext uri="{C572A759-6A51-4108-AA02-DFA0A04FC94B}">
-              <ma14:wrappingTextBoxFlag xmlns="" xmlns:m="http://schemas.openxmlformats.org/officeDocument/2006/math" xmlns:a14="http://schemas.microsoft.com/office/drawing/2010/main" xmlns:ma14="http://schemas.microsoft.com/office/mac/drawingml/2011/main" val="1"/>
+              <ma14:wrappingTextBoxFlag xmlns:ma14="http://schemas.microsoft.com/office/mac/drawingml/2011/main" xmlns:a14="http://schemas.microsoft.com/office/drawing/2010/main" xmlns:m="http://schemas.openxmlformats.org/officeDocument/2006/math" xmlns="" val="1"/>
             </a:ext>
           </a:extLst>
         </p:spPr>
@@ -8984,7 +8976,7 @@
           </a:ln>
           <a:extLst>
             <a:ext uri="{C572A759-6A51-4108-AA02-DFA0A04FC94B}">
-              <ma14:wrappingTextBoxFlag xmlns="" xmlns:m="http://schemas.openxmlformats.org/officeDocument/2006/math" xmlns:a14="http://schemas.microsoft.com/office/drawing/2010/main" xmlns:ma14="http://schemas.microsoft.com/office/mac/drawingml/2011/main" val="1"/>
+              <ma14:wrappingTextBoxFlag xmlns:ma14="http://schemas.microsoft.com/office/mac/drawingml/2011/main" xmlns:a14="http://schemas.microsoft.com/office/drawing/2010/main" xmlns:m="http://schemas.openxmlformats.org/officeDocument/2006/math" xmlns="" val="1"/>
             </a:ext>
           </a:extLst>
         </p:spPr>
@@ -9140,7 +9132,7 @@
           </a:ln>
           <a:extLst>
             <a:ext uri="{C572A759-6A51-4108-AA02-DFA0A04FC94B}">
-              <ma14:wrappingTextBoxFlag xmlns:ma14="http://schemas.microsoft.com/office/mac/drawingml/2011/main" xmlns:a14="http://schemas.microsoft.com/office/drawing/2010/main" xmlns:m="http://schemas.openxmlformats.org/officeDocument/2006/math" xmlns="" val="1"/>
+              <ma14:wrappingTextBoxFlag xmlns="" xmlns:m="http://schemas.openxmlformats.org/officeDocument/2006/math" xmlns:a14="http://schemas.microsoft.com/office/drawing/2010/main" xmlns:ma14="http://schemas.microsoft.com/office/mac/drawingml/2011/main" val="1"/>
             </a:ext>
           </a:extLst>
         </p:spPr>
@@ -9188,7 +9180,7 @@
           </a:ln>
           <a:extLst>
             <a:ext uri="{C572A759-6A51-4108-AA02-DFA0A04FC94B}">
-              <ma14:wrappingTextBoxFlag xmlns:ma14="http://schemas.microsoft.com/office/mac/drawingml/2011/main" xmlns:a14="http://schemas.microsoft.com/office/drawing/2010/main" xmlns:m="http://schemas.openxmlformats.org/officeDocument/2006/math" xmlns="" val="1"/>
+              <ma14:wrappingTextBoxFlag xmlns="" xmlns:m="http://schemas.openxmlformats.org/officeDocument/2006/math" xmlns:a14="http://schemas.microsoft.com/office/drawing/2010/main" xmlns:ma14="http://schemas.microsoft.com/office/mac/drawingml/2011/main" val="1"/>
             </a:ext>
           </a:extLst>
         </p:spPr>
@@ -9447,7 +9439,7 @@
           </a:ln>
           <a:extLst>
             <a:ext uri="{C572A759-6A51-4108-AA02-DFA0A04FC94B}">
-              <ma14:wrappingTextBoxFlag xmlns="" xmlns:m="http://schemas.openxmlformats.org/officeDocument/2006/math" xmlns:a14="http://schemas.microsoft.com/office/drawing/2010/main" xmlns:ma14="http://schemas.microsoft.com/office/mac/drawingml/2011/main" val="1"/>
+              <ma14:wrappingTextBoxFlag xmlns:ma14="http://schemas.microsoft.com/office/mac/drawingml/2011/main" xmlns:a14="http://schemas.microsoft.com/office/drawing/2010/main" xmlns:m="http://schemas.openxmlformats.org/officeDocument/2006/math" xmlns="" val="1"/>
             </a:ext>
           </a:extLst>
         </p:spPr>
@@ -9487,7 +9479,7 @@
           </a:ln>
           <a:extLst>
             <a:ext uri="{C572A759-6A51-4108-AA02-DFA0A04FC94B}">
-              <ma14:wrappingTextBoxFlag xmlns="" xmlns:m="http://schemas.openxmlformats.org/officeDocument/2006/math" xmlns:a14="http://schemas.microsoft.com/office/drawing/2010/main" xmlns:ma14="http://schemas.microsoft.com/office/mac/drawingml/2011/main" val="1"/>
+              <ma14:wrappingTextBoxFlag xmlns:ma14="http://schemas.microsoft.com/office/mac/drawingml/2011/main" xmlns:a14="http://schemas.microsoft.com/office/drawing/2010/main" xmlns:m="http://schemas.openxmlformats.org/officeDocument/2006/math" xmlns="" val="1"/>
             </a:ext>
           </a:extLst>
         </p:spPr>
@@ -9527,7 +9519,7 @@
           </a:ln>
           <a:extLst>
             <a:ext uri="{C572A759-6A51-4108-AA02-DFA0A04FC94B}">
-              <ma14:wrappingTextBoxFlag xmlns="" xmlns:m="http://schemas.openxmlformats.org/officeDocument/2006/math" xmlns:a14="http://schemas.microsoft.com/office/drawing/2010/main" xmlns:ma14="http://schemas.microsoft.com/office/mac/drawingml/2011/main" val="1"/>
+              <ma14:wrappingTextBoxFlag xmlns:ma14="http://schemas.microsoft.com/office/mac/drawingml/2011/main" xmlns:a14="http://schemas.microsoft.com/office/drawing/2010/main" xmlns:m="http://schemas.openxmlformats.org/officeDocument/2006/math" xmlns="" val="1"/>
             </a:ext>
           </a:extLst>
         </p:spPr>
@@ -9575,7 +9567,7 @@
           </a:ln>
           <a:extLst>
             <a:ext uri="{C572A759-6A51-4108-AA02-DFA0A04FC94B}">
-              <ma14:wrappingTextBoxFlag xmlns="" xmlns:m="http://schemas.openxmlformats.org/officeDocument/2006/math" xmlns:a14="http://schemas.microsoft.com/office/drawing/2010/main" xmlns:ma14="http://schemas.microsoft.com/office/mac/drawingml/2011/main" val="1"/>
+              <ma14:wrappingTextBoxFlag xmlns:ma14="http://schemas.microsoft.com/office/mac/drawingml/2011/main" xmlns:a14="http://schemas.microsoft.com/office/drawing/2010/main" xmlns:m="http://schemas.openxmlformats.org/officeDocument/2006/math" xmlns="" val="1"/>
             </a:ext>
           </a:extLst>
         </p:spPr>
@@ -9671,7 +9663,7 @@
           </a:ln>
           <a:extLst>
             <a:ext uri="{C572A759-6A51-4108-AA02-DFA0A04FC94B}">
-              <ma14:wrappingTextBoxFlag xmlns="" xmlns:m="http://schemas.openxmlformats.org/officeDocument/2006/math" xmlns:a14="http://schemas.microsoft.com/office/drawing/2010/main" xmlns:ma14="http://schemas.microsoft.com/office/mac/drawingml/2011/main" val="1"/>
+              <ma14:wrappingTextBoxFlag xmlns:ma14="http://schemas.microsoft.com/office/mac/drawingml/2011/main" xmlns:a14="http://schemas.microsoft.com/office/drawing/2010/main" xmlns:m="http://schemas.openxmlformats.org/officeDocument/2006/math" xmlns="" val="1"/>
             </a:ext>
           </a:extLst>
         </p:spPr>
@@ -9797,7 +9789,7 @@
           </a:ln>
           <a:extLst>
             <a:ext uri="{C572A759-6A51-4108-AA02-DFA0A04FC94B}">
-              <ma14:wrappingTextBoxFlag xmlns:ma14="http://schemas.microsoft.com/office/mac/drawingml/2011/main" xmlns:a14="http://schemas.microsoft.com/office/drawing/2010/main" xmlns:m="http://schemas.openxmlformats.org/officeDocument/2006/math" xmlns="" val="1"/>
+              <ma14:wrappingTextBoxFlag xmlns="" xmlns:m="http://schemas.openxmlformats.org/officeDocument/2006/math" xmlns:a14="http://schemas.microsoft.com/office/drawing/2010/main" xmlns:ma14="http://schemas.microsoft.com/office/mac/drawingml/2011/main" val="1"/>
             </a:ext>
           </a:extLst>
         </p:spPr>
@@ -10034,7 +10026,7 @@
           </a:ln>
           <a:extLst>
             <a:ext uri="{C572A759-6A51-4108-AA02-DFA0A04FC94B}">
-              <ma14:wrappingTextBoxFlag xmlns="" xmlns:m="http://schemas.openxmlformats.org/officeDocument/2006/math" xmlns:a14="http://schemas.microsoft.com/office/drawing/2010/main" xmlns:ma14="http://schemas.microsoft.com/office/mac/drawingml/2011/main" val="1"/>
+              <ma14:wrappingTextBoxFlag xmlns:ma14="http://schemas.microsoft.com/office/mac/drawingml/2011/main" xmlns:a14="http://schemas.microsoft.com/office/drawing/2010/main" xmlns:m="http://schemas.openxmlformats.org/officeDocument/2006/math" xmlns="" val="1"/>
             </a:ext>
           </a:extLst>
         </p:spPr>
@@ -10074,7 +10066,7 @@
           </a:ln>
           <a:extLst>
             <a:ext uri="{C572A759-6A51-4108-AA02-DFA0A04FC94B}">
-              <ma14:wrappingTextBoxFlag xmlns="" xmlns:m="http://schemas.openxmlformats.org/officeDocument/2006/math" xmlns:a14="http://schemas.microsoft.com/office/drawing/2010/main" xmlns:ma14="http://schemas.microsoft.com/office/mac/drawingml/2011/main" val="1"/>
+              <ma14:wrappingTextBoxFlag xmlns:ma14="http://schemas.microsoft.com/office/mac/drawingml/2011/main" xmlns:a14="http://schemas.microsoft.com/office/drawing/2010/main" xmlns:m="http://schemas.openxmlformats.org/officeDocument/2006/math" xmlns="" val="1"/>
             </a:ext>
           </a:extLst>
         </p:spPr>
@@ -10122,7 +10114,7 @@
           </a:ln>
           <a:extLst>
             <a:ext uri="{C572A759-6A51-4108-AA02-DFA0A04FC94B}">
-              <ma14:wrappingTextBoxFlag xmlns="" xmlns:m="http://schemas.openxmlformats.org/officeDocument/2006/math" xmlns:a14="http://schemas.microsoft.com/office/drawing/2010/main" xmlns:ma14="http://schemas.microsoft.com/office/mac/drawingml/2011/main" val="1"/>
+              <ma14:wrappingTextBoxFlag xmlns:ma14="http://schemas.microsoft.com/office/mac/drawingml/2011/main" xmlns:a14="http://schemas.microsoft.com/office/drawing/2010/main" xmlns:m="http://schemas.openxmlformats.org/officeDocument/2006/math" xmlns="" val="1"/>
             </a:ext>
           </a:extLst>
         </p:spPr>
@@ -10158,7 +10150,7 @@
           </a:ln>
           <a:extLst>
             <a:ext uri="{C572A759-6A51-4108-AA02-DFA0A04FC94B}">
-              <ma14:wrappingTextBoxFlag xmlns="" xmlns:m="http://schemas.openxmlformats.org/officeDocument/2006/math" xmlns:a14="http://schemas.microsoft.com/office/drawing/2010/main" xmlns:ma14="http://schemas.microsoft.com/office/mac/drawingml/2011/main" val="1"/>
+              <ma14:wrappingTextBoxFlag xmlns:ma14="http://schemas.microsoft.com/office/mac/drawingml/2011/main" xmlns:a14="http://schemas.microsoft.com/office/drawing/2010/main" xmlns:m="http://schemas.openxmlformats.org/officeDocument/2006/math" xmlns="" val="1"/>
             </a:ext>
           </a:extLst>
         </p:spPr>
@@ -10198,7 +10190,7 @@
           </a:ln>
           <a:extLst>
             <a:ext uri="{C572A759-6A51-4108-AA02-DFA0A04FC94B}">
-              <ma14:wrappingTextBoxFlag xmlns="" xmlns:m="http://schemas.openxmlformats.org/officeDocument/2006/math" xmlns:a14="http://schemas.microsoft.com/office/drawing/2010/main" xmlns:ma14="http://schemas.microsoft.com/office/mac/drawingml/2011/main" val="1"/>
+              <ma14:wrappingTextBoxFlag xmlns:ma14="http://schemas.microsoft.com/office/mac/drawingml/2011/main" xmlns:a14="http://schemas.microsoft.com/office/drawing/2010/main" xmlns:m="http://schemas.openxmlformats.org/officeDocument/2006/math" xmlns="" val="1"/>
             </a:ext>
           </a:extLst>
         </p:spPr>
@@ -10234,7 +10226,7 @@
           </a:ln>
           <a:extLst>
             <a:ext uri="{C572A759-6A51-4108-AA02-DFA0A04FC94B}">
-              <ma14:wrappingTextBoxFlag xmlns="" xmlns:m="http://schemas.openxmlformats.org/officeDocument/2006/math" xmlns:a14="http://schemas.microsoft.com/office/drawing/2010/main" xmlns:ma14="http://schemas.microsoft.com/office/mac/drawingml/2011/main" val="1"/>
+              <ma14:wrappingTextBoxFlag xmlns:ma14="http://schemas.microsoft.com/office/mac/drawingml/2011/main" xmlns:a14="http://schemas.microsoft.com/office/drawing/2010/main" xmlns:m="http://schemas.openxmlformats.org/officeDocument/2006/math" xmlns="" val="1"/>
             </a:ext>
           </a:extLst>
         </p:spPr>
@@ -10270,7 +10262,7 @@
           </a:ln>
           <a:extLst>
             <a:ext uri="{C572A759-6A51-4108-AA02-DFA0A04FC94B}">
-              <ma14:wrappingTextBoxFlag xmlns="" xmlns:m="http://schemas.openxmlformats.org/officeDocument/2006/math" xmlns:a14="http://schemas.microsoft.com/office/drawing/2010/main" xmlns:ma14="http://schemas.microsoft.com/office/mac/drawingml/2011/main" val="1"/>
+              <ma14:wrappingTextBoxFlag xmlns:ma14="http://schemas.microsoft.com/office/mac/drawingml/2011/main" xmlns:a14="http://schemas.microsoft.com/office/drawing/2010/main" xmlns:m="http://schemas.openxmlformats.org/officeDocument/2006/math" xmlns="" val="1"/>
             </a:ext>
           </a:extLst>
         </p:spPr>
@@ -10338,7 +10330,7 @@
           </a:ln>
           <a:extLst>
             <a:ext uri="{C572A759-6A51-4108-AA02-DFA0A04FC94B}">
-              <ma14:wrappingTextBoxFlag xmlns="" xmlns:m="http://schemas.openxmlformats.org/officeDocument/2006/math" xmlns:a14="http://schemas.microsoft.com/office/drawing/2010/main" xmlns:ma14="http://schemas.microsoft.com/office/mac/drawingml/2011/main" val="1"/>
+              <ma14:wrappingTextBoxFlag xmlns:ma14="http://schemas.microsoft.com/office/mac/drawingml/2011/main" xmlns:a14="http://schemas.microsoft.com/office/drawing/2010/main" xmlns:m="http://schemas.openxmlformats.org/officeDocument/2006/math" xmlns="" val="1"/>
             </a:ext>
           </a:extLst>
         </p:spPr>
@@ -10412,7 +10404,7 @@
           </a:ln>
           <a:extLst>
             <a:ext uri="{C572A759-6A51-4108-AA02-DFA0A04FC94B}">
-              <ma14:wrappingTextBoxFlag xmlns="" xmlns:m="http://schemas.openxmlformats.org/officeDocument/2006/math" xmlns:a14="http://schemas.microsoft.com/office/drawing/2010/main" xmlns:ma14="http://schemas.microsoft.com/office/mac/drawingml/2011/main" val="1"/>
+              <ma14:wrappingTextBoxFlag xmlns:ma14="http://schemas.microsoft.com/office/mac/drawingml/2011/main" xmlns:a14="http://schemas.microsoft.com/office/drawing/2010/main" xmlns:m="http://schemas.openxmlformats.org/officeDocument/2006/math" xmlns="" val="1"/>
             </a:ext>
           </a:extLst>
         </p:spPr>

--- a/lectures/2026_GNET749_Lecture6_Viz_ExpDesign.pptx
+++ b/lectures/2026_GNET749_Lecture6_Viz_ExpDesign.pptx
@@ -5,7 +5,7 @@
     <p:sldMasterId id="2147483648" r:id="rId1"/>
   </p:sldMasterIdLst>
   <p:notesMasterIdLst>
-    <p:notesMasterId r:id="rId30"/>
+    <p:notesMasterId r:id="rId31"/>
   </p:notesMasterIdLst>
   <p:sldIdLst>
     <p:sldId id="350" r:id="rId2"/>
@@ -22,20 +22,21 @@
     <p:sldId id="353" r:id="rId13"/>
     <p:sldId id="354" r:id="rId14"/>
     <p:sldId id="317" r:id="rId15"/>
-    <p:sldId id="309" r:id="rId16"/>
-    <p:sldId id="310" r:id="rId17"/>
-    <p:sldId id="311" r:id="rId18"/>
-    <p:sldId id="312" r:id="rId19"/>
-    <p:sldId id="313" r:id="rId20"/>
-    <p:sldId id="314" r:id="rId21"/>
-    <p:sldId id="315" r:id="rId22"/>
-    <p:sldId id="355" r:id="rId23"/>
-    <p:sldId id="356" r:id="rId24"/>
-    <p:sldId id="357" r:id="rId25"/>
-    <p:sldId id="361" r:id="rId26"/>
-    <p:sldId id="358" r:id="rId27"/>
-    <p:sldId id="359" r:id="rId28"/>
-    <p:sldId id="360" r:id="rId29"/>
+    <p:sldId id="362" r:id="rId16"/>
+    <p:sldId id="309" r:id="rId17"/>
+    <p:sldId id="310" r:id="rId18"/>
+    <p:sldId id="311" r:id="rId19"/>
+    <p:sldId id="312" r:id="rId20"/>
+    <p:sldId id="313" r:id="rId21"/>
+    <p:sldId id="314" r:id="rId22"/>
+    <p:sldId id="315" r:id="rId23"/>
+    <p:sldId id="355" r:id="rId24"/>
+    <p:sldId id="356" r:id="rId25"/>
+    <p:sldId id="357" r:id="rId26"/>
+    <p:sldId id="361" r:id="rId27"/>
+    <p:sldId id="358" r:id="rId28"/>
+    <p:sldId id="359" r:id="rId29"/>
+    <p:sldId id="360" r:id="rId30"/>
   </p:sldIdLst>
   <p:sldSz cx="12192000" cy="6858000"/>
   <p:notesSz cx="6858000" cy="9144000"/>
@@ -4341,7 +4342,7 @@
           </a:ln>
           <a:extLst>
             <a:ext uri="{C572A759-6A51-4108-AA02-DFA0A04FC94B}">
-              <ma14:wrappingTextBoxFlag xmlns:ma14="http://schemas.microsoft.com/office/mac/drawingml/2011/main" xmlns:a14="http://schemas.microsoft.com/office/drawing/2010/main" xmlns:m="http://schemas.openxmlformats.org/officeDocument/2006/math" xmlns="" val="1"/>
+              <ma14:wrappingTextBoxFlag xmlns="" xmlns:m="http://schemas.openxmlformats.org/officeDocument/2006/math" xmlns:a14="http://schemas.microsoft.com/office/drawing/2010/main" xmlns:ma14="http://schemas.microsoft.com/office/mac/drawingml/2011/main" val="1"/>
             </a:ext>
           </a:extLst>
         </p:spPr>
@@ -4381,7 +4382,7 @@
           </a:ln>
           <a:extLst>
             <a:ext uri="{C572A759-6A51-4108-AA02-DFA0A04FC94B}">
-              <ma14:wrappingTextBoxFlag xmlns:ma14="http://schemas.microsoft.com/office/mac/drawingml/2011/main" xmlns:a14="http://schemas.microsoft.com/office/drawing/2010/main" xmlns:m="http://schemas.openxmlformats.org/officeDocument/2006/math" xmlns="" val="1"/>
+              <ma14:wrappingTextBoxFlag xmlns="" xmlns:m="http://schemas.openxmlformats.org/officeDocument/2006/math" xmlns:a14="http://schemas.microsoft.com/office/drawing/2010/main" xmlns:ma14="http://schemas.microsoft.com/office/mac/drawingml/2011/main" val="1"/>
             </a:ext>
           </a:extLst>
         </p:spPr>
@@ -4537,7 +4538,7 @@
           </a:ln>
           <a:extLst>
             <a:ext uri="{C572A759-6A51-4108-AA02-DFA0A04FC94B}">
-              <ma14:wrappingTextBoxFlag xmlns:ma14="http://schemas.microsoft.com/office/mac/drawingml/2011/main" xmlns:a14="http://schemas.microsoft.com/office/drawing/2010/main" xmlns:m="http://schemas.openxmlformats.org/officeDocument/2006/math" xmlns="" val="1"/>
+              <ma14:wrappingTextBoxFlag xmlns="" xmlns:m="http://schemas.openxmlformats.org/officeDocument/2006/math" xmlns:a14="http://schemas.microsoft.com/office/drawing/2010/main" xmlns:ma14="http://schemas.microsoft.com/office/mac/drawingml/2011/main" val="1"/>
             </a:ext>
           </a:extLst>
         </p:spPr>
@@ -4573,7 +4574,7 @@
           </a:ln>
           <a:extLst>
             <a:ext uri="{C572A759-6A51-4108-AA02-DFA0A04FC94B}">
-              <ma14:wrappingTextBoxFlag xmlns:ma14="http://schemas.microsoft.com/office/mac/drawingml/2011/main" xmlns:a14="http://schemas.microsoft.com/office/drawing/2010/main" xmlns:m="http://schemas.openxmlformats.org/officeDocument/2006/math" xmlns="" val="1"/>
+              <ma14:wrappingTextBoxFlag xmlns="" xmlns:m="http://schemas.openxmlformats.org/officeDocument/2006/math" xmlns:a14="http://schemas.microsoft.com/office/drawing/2010/main" xmlns:ma14="http://schemas.microsoft.com/office/mac/drawingml/2011/main" val="1"/>
             </a:ext>
           </a:extLst>
         </p:spPr>
@@ -4609,7 +4610,7 @@
           </a:ln>
           <a:extLst>
             <a:ext uri="{C572A759-6A51-4108-AA02-DFA0A04FC94B}">
-              <ma14:wrappingTextBoxFlag xmlns:ma14="http://schemas.microsoft.com/office/mac/drawingml/2011/main" xmlns:a14="http://schemas.microsoft.com/office/drawing/2010/main" xmlns:m="http://schemas.openxmlformats.org/officeDocument/2006/math" xmlns="" val="1"/>
+              <ma14:wrappingTextBoxFlag xmlns="" xmlns:m="http://schemas.openxmlformats.org/officeDocument/2006/math" xmlns:a14="http://schemas.microsoft.com/office/drawing/2010/main" xmlns:ma14="http://schemas.microsoft.com/office/mac/drawingml/2011/main" val="1"/>
             </a:ext>
           </a:extLst>
         </p:spPr>
@@ -4645,7 +4646,7 @@
           </a:ln>
           <a:extLst>
             <a:ext uri="{C572A759-6A51-4108-AA02-DFA0A04FC94B}">
-              <ma14:wrappingTextBoxFlag xmlns:ma14="http://schemas.microsoft.com/office/mac/drawingml/2011/main" xmlns:a14="http://schemas.microsoft.com/office/drawing/2010/main" xmlns:m="http://schemas.openxmlformats.org/officeDocument/2006/math" xmlns="" val="1"/>
+              <ma14:wrappingTextBoxFlag xmlns="" xmlns:m="http://schemas.openxmlformats.org/officeDocument/2006/math" xmlns:a14="http://schemas.microsoft.com/office/drawing/2010/main" xmlns:ma14="http://schemas.microsoft.com/office/mac/drawingml/2011/main" val="1"/>
             </a:ext>
           </a:extLst>
         </p:spPr>
@@ -4681,7 +4682,7 @@
           </a:ln>
           <a:extLst>
             <a:ext uri="{C572A759-6A51-4108-AA02-DFA0A04FC94B}">
-              <ma14:wrappingTextBoxFlag xmlns:ma14="http://schemas.microsoft.com/office/mac/drawingml/2011/main" xmlns:a14="http://schemas.microsoft.com/office/drawing/2010/main" xmlns:m="http://schemas.openxmlformats.org/officeDocument/2006/math" xmlns="" val="1"/>
+              <ma14:wrappingTextBoxFlag xmlns="" xmlns:m="http://schemas.openxmlformats.org/officeDocument/2006/math" xmlns:a14="http://schemas.microsoft.com/office/drawing/2010/main" xmlns:ma14="http://schemas.microsoft.com/office/mac/drawingml/2011/main" val="1"/>
             </a:ext>
           </a:extLst>
         </p:spPr>
@@ -4748,7 +4749,7 @@
           </a:ln>
           <a:extLst>
             <a:ext uri="{C572A759-6A51-4108-AA02-DFA0A04FC94B}">
-              <ma14:wrappingTextBoxFlag xmlns:ma14="http://schemas.microsoft.com/office/mac/drawingml/2011/main" xmlns:a14="http://schemas.microsoft.com/office/drawing/2010/main" xmlns:m="http://schemas.openxmlformats.org/officeDocument/2006/math" xmlns="" val="1"/>
+              <ma14:wrappingTextBoxFlag xmlns="" xmlns:m="http://schemas.openxmlformats.org/officeDocument/2006/math" xmlns:a14="http://schemas.microsoft.com/office/drawing/2010/main" xmlns:ma14="http://schemas.microsoft.com/office/mac/drawingml/2011/main" val="1"/>
             </a:ext>
           </a:extLst>
         </p:spPr>
@@ -4933,7 +4934,7 @@
           </a:ln>
           <a:extLst>
             <a:ext uri="{C572A759-6A51-4108-AA02-DFA0A04FC94B}">
-              <ma14:wrappingTextBoxFlag xmlns:ma14="http://schemas.microsoft.com/office/mac/drawingml/2011/main" xmlns:a14="http://schemas.microsoft.com/office/drawing/2010/main" xmlns:m="http://schemas.openxmlformats.org/officeDocument/2006/math" xmlns="" val="1"/>
+              <ma14:wrappingTextBoxFlag xmlns="" xmlns:m="http://schemas.openxmlformats.org/officeDocument/2006/math" xmlns:a14="http://schemas.microsoft.com/office/drawing/2010/main" xmlns:ma14="http://schemas.microsoft.com/office/mac/drawingml/2011/main" val="1"/>
             </a:ext>
           </a:extLst>
         </p:spPr>
@@ -4974,7 +4975,7 @@
           </a:ln>
           <a:extLst>
             <a:ext uri="{C572A759-6A51-4108-AA02-DFA0A04FC94B}">
-              <ma14:wrappingTextBoxFlag xmlns:ma14="http://schemas.microsoft.com/office/mac/drawingml/2011/main" xmlns:a14="http://schemas.microsoft.com/office/drawing/2010/main" xmlns:m="http://schemas.openxmlformats.org/officeDocument/2006/math" xmlns="" val="1"/>
+              <ma14:wrappingTextBoxFlag xmlns="" xmlns:m="http://schemas.openxmlformats.org/officeDocument/2006/math" xmlns:a14="http://schemas.microsoft.com/office/drawing/2010/main" xmlns:ma14="http://schemas.microsoft.com/office/mac/drawingml/2011/main" val="1"/>
             </a:ext>
           </a:extLst>
         </p:spPr>
@@ -5130,7 +5131,7 @@
           </a:ln>
           <a:extLst>
             <a:ext uri="{C572A759-6A51-4108-AA02-DFA0A04FC94B}">
-              <ma14:wrappingTextBoxFlag xmlns:ma14="http://schemas.microsoft.com/office/mac/drawingml/2011/main" xmlns:a14="http://schemas.microsoft.com/office/drawing/2010/main" xmlns:m="http://schemas.openxmlformats.org/officeDocument/2006/math" xmlns="" val="1"/>
+              <ma14:wrappingTextBoxFlag xmlns="" xmlns:m="http://schemas.openxmlformats.org/officeDocument/2006/math" xmlns:a14="http://schemas.microsoft.com/office/drawing/2010/main" xmlns:ma14="http://schemas.microsoft.com/office/mac/drawingml/2011/main" val="1"/>
             </a:ext>
           </a:extLst>
         </p:spPr>
@@ -5166,7 +5167,7 @@
           </a:ln>
           <a:extLst>
             <a:ext uri="{C572A759-6A51-4108-AA02-DFA0A04FC94B}">
-              <ma14:wrappingTextBoxFlag xmlns:ma14="http://schemas.microsoft.com/office/mac/drawingml/2011/main" xmlns:a14="http://schemas.microsoft.com/office/drawing/2010/main" xmlns:m="http://schemas.openxmlformats.org/officeDocument/2006/math" xmlns="" val="1"/>
+              <ma14:wrappingTextBoxFlag xmlns="" xmlns:m="http://schemas.openxmlformats.org/officeDocument/2006/math" xmlns:a14="http://schemas.microsoft.com/office/drawing/2010/main" xmlns:ma14="http://schemas.microsoft.com/office/mac/drawingml/2011/main" val="1"/>
             </a:ext>
           </a:extLst>
         </p:spPr>
@@ -5202,7 +5203,7 @@
           </a:ln>
           <a:extLst>
             <a:ext uri="{C572A759-6A51-4108-AA02-DFA0A04FC94B}">
-              <ma14:wrappingTextBoxFlag xmlns:ma14="http://schemas.microsoft.com/office/mac/drawingml/2011/main" xmlns:a14="http://schemas.microsoft.com/office/drawing/2010/main" xmlns:m="http://schemas.openxmlformats.org/officeDocument/2006/math" xmlns="" val="1"/>
+              <ma14:wrappingTextBoxFlag xmlns="" xmlns:m="http://schemas.openxmlformats.org/officeDocument/2006/math" xmlns:a14="http://schemas.microsoft.com/office/drawing/2010/main" xmlns:ma14="http://schemas.microsoft.com/office/mac/drawingml/2011/main" val="1"/>
             </a:ext>
           </a:extLst>
         </p:spPr>
@@ -5238,7 +5239,7 @@
           </a:ln>
           <a:extLst>
             <a:ext uri="{C572A759-6A51-4108-AA02-DFA0A04FC94B}">
-              <ma14:wrappingTextBoxFlag xmlns:ma14="http://schemas.microsoft.com/office/mac/drawingml/2011/main" xmlns:a14="http://schemas.microsoft.com/office/drawing/2010/main" xmlns:m="http://schemas.openxmlformats.org/officeDocument/2006/math" xmlns="" val="1"/>
+              <ma14:wrappingTextBoxFlag xmlns="" xmlns:m="http://schemas.openxmlformats.org/officeDocument/2006/math" xmlns:a14="http://schemas.microsoft.com/office/drawing/2010/main" xmlns:ma14="http://schemas.microsoft.com/office/mac/drawingml/2011/main" val="1"/>
             </a:ext>
           </a:extLst>
         </p:spPr>
@@ -5274,7 +5275,7 @@
           </a:ln>
           <a:extLst>
             <a:ext uri="{C572A759-6A51-4108-AA02-DFA0A04FC94B}">
-              <ma14:wrappingTextBoxFlag xmlns:ma14="http://schemas.microsoft.com/office/mac/drawingml/2011/main" xmlns:a14="http://schemas.microsoft.com/office/drawing/2010/main" xmlns:m="http://schemas.openxmlformats.org/officeDocument/2006/math" xmlns="" val="1"/>
+              <ma14:wrappingTextBoxFlag xmlns="" xmlns:m="http://schemas.openxmlformats.org/officeDocument/2006/math" xmlns:a14="http://schemas.microsoft.com/office/drawing/2010/main" xmlns:ma14="http://schemas.microsoft.com/office/mac/drawingml/2011/main" val="1"/>
             </a:ext>
           </a:extLst>
         </p:spPr>
@@ -5323,7 +5324,7 @@
           </a:ln>
           <a:extLst>
             <a:ext uri="{C572A759-6A51-4108-AA02-DFA0A04FC94B}">
-              <ma14:wrappingTextBoxFlag xmlns:ma14="http://schemas.microsoft.com/office/mac/drawingml/2011/main" xmlns:a14="http://schemas.microsoft.com/office/drawing/2010/main" xmlns:m="http://schemas.openxmlformats.org/officeDocument/2006/math" xmlns="" val="1"/>
+              <ma14:wrappingTextBoxFlag xmlns="" xmlns:m="http://schemas.openxmlformats.org/officeDocument/2006/math" xmlns:a14="http://schemas.microsoft.com/office/drawing/2010/main" xmlns:ma14="http://schemas.microsoft.com/office/mac/drawingml/2011/main" val="1"/>
             </a:ext>
           </a:extLst>
         </p:spPr>
@@ -5364,7 +5365,7 @@
           </a:ln>
           <a:extLst>
             <a:ext uri="{C572A759-6A51-4108-AA02-DFA0A04FC94B}">
-              <ma14:wrappingTextBoxFlag xmlns:ma14="http://schemas.microsoft.com/office/mac/drawingml/2011/main" xmlns:a14="http://schemas.microsoft.com/office/drawing/2010/main" xmlns:m="http://schemas.openxmlformats.org/officeDocument/2006/math" xmlns="" val="1"/>
+              <ma14:wrappingTextBoxFlag xmlns="" xmlns:m="http://schemas.openxmlformats.org/officeDocument/2006/math" xmlns:a14="http://schemas.microsoft.com/office/drawing/2010/main" xmlns:ma14="http://schemas.microsoft.com/office/mac/drawingml/2011/main" val="1"/>
             </a:ext>
           </a:extLst>
         </p:spPr>
@@ -5404,7 +5405,7 @@
           </a:ln>
           <a:extLst>
             <a:ext uri="{C572A759-6A51-4108-AA02-DFA0A04FC94B}">
-              <ma14:wrappingTextBoxFlag xmlns:ma14="http://schemas.microsoft.com/office/mac/drawingml/2011/main" xmlns:a14="http://schemas.microsoft.com/office/drawing/2010/main" xmlns:m="http://schemas.openxmlformats.org/officeDocument/2006/math" xmlns="" val="1"/>
+              <ma14:wrappingTextBoxFlag xmlns="" xmlns:m="http://schemas.openxmlformats.org/officeDocument/2006/math" xmlns:a14="http://schemas.microsoft.com/office/drawing/2010/main" xmlns:ma14="http://schemas.microsoft.com/office/mac/drawingml/2011/main" val="1"/>
             </a:ext>
           </a:extLst>
         </p:spPr>
@@ -5556,7 +5557,7 @@
           </a:ln>
           <a:extLst>
             <a:ext uri="{C572A759-6A51-4108-AA02-DFA0A04FC94B}">
-              <ma14:wrappingTextBoxFlag xmlns="" xmlns:m="http://schemas.openxmlformats.org/officeDocument/2006/math" xmlns:a14="http://schemas.microsoft.com/office/drawing/2010/main" xmlns:ma14="http://schemas.microsoft.com/office/mac/drawingml/2011/main" val="1"/>
+              <ma14:wrappingTextBoxFlag xmlns:ma14="http://schemas.microsoft.com/office/mac/drawingml/2011/main" xmlns:a14="http://schemas.microsoft.com/office/drawing/2010/main" xmlns:m="http://schemas.openxmlformats.org/officeDocument/2006/math" xmlns="" val="1"/>
             </a:ext>
           </a:extLst>
         </p:spPr>
@@ -5597,7 +5598,7 @@
           </a:ln>
           <a:extLst>
             <a:ext uri="{C572A759-6A51-4108-AA02-DFA0A04FC94B}">
-              <ma14:wrappingTextBoxFlag xmlns="" xmlns:m="http://schemas.openxmlformats.org/officeDocument/2006/math" xmlns:a14="http://schemas.microsoft.com/office/drawing/2010/main" xmlns:ma14="http://schemas.microsoft.com/office/mac/drawingml/2011/main" val="1"/>
+              <ma14:wrappingTextBoxFlag xmlns:ma14="http://schemas.microsoft.com/office/mac/drawingml/2011/main" xmlns:a14="http://schemas.microsoft.com/office/drawing/2010/main" xmlns:m="http://schemas.openxmlformats.org/officeDocument/2006/math" xmlns="" val="1"/>
             </a:ext>
           </a:extLst>
         </p:spPr>
@@ -5753,7 +5754,7 @@
           </a:ln>
           <a:extLst>
             <a:ext uri="{C572A759-6A51-4108-AA02-DFA0A04FC94B}">
-              <ma14:wrappingTextBoxFlag xmlns="" xmlns:m="http://schemas.openxmlformats.org/officeDocument/2006/math" xmlns:a14="http://schemas.microsoft.com/office/drawing/2010/main" xmlns:ma14="http://schemas.microsoft.com/office/mac/drawingml/2011/main" val="1"/>
+              <ma14:wrappingTextBoxFlag xmlns:ma14="http://schemas.microsoft.com/office/mac/drawingml/2011/main" xmlns:a14="http://schemas.microsoft.com/office/drawing/2010/main" xmlns:m="http://schemas.openxmlformats.org/officeDocument/2006/math" xmlns="" val="1"/>
             </a:ext>
           </a:extLst>
         </p:spPr>
@@ -5789,7 +5790,7 @@
           </a:ln>
           <a:extLst>
             <a:ext uri="{C572A759-6A51-4108-AA02-DFA0A04FC94B}">
-              <ma14:wrappingTextBoxFlag xmlns="" xmlns:m="http://schemas.openxmlformats.org/officeDocument/2006/math" xmlns:a14="http://schemas.microsoft.com/office/drawing/2010/main" xmlns:ma14="http://schemas.microsoft.com/office/mac/drawingml/2011/main" val="1"/>
+              <ma14:wrappingTextBoxFlag xmlns:ma14="http://schemas.microsoft.com/office/mac/drawingml/2011/main" xmlns:a14="http://schemas.microsoft.com/office/drawing/2010/main" xmlns:m="http://schemas.openxmlformats.org/officeDocument/2006/math" xmlns="" val="1"/>
             </a:ext>
           </a:extLst>
         </p:spPr>
@@ -5825,7 +5826,7 @@
           </a:ln>
           <a:extLst>
             <a:ext uri="{C572A759-6A51-4108-AA02-DFA0A04FC94B}">
-              <ma14:wrappingTextBoxFlag xmlns="" xmlns:m="http://schemas.openxmlformats.org/officeDocument/2006/math" xmlns:a14="http://schemas.microsoft.com/office/drawing/2010/main" xmlns:ma14="http://schemas.microsoft.com/office/mac/drawingml/2011/main" val="1"/>
+              <ma14:wrappingTextBoxFlag xmlns:ma14="http://schemas.microsoft.com/office/mac/drawingml/2011/main" xmlns:a14="http://schemas.microsoft.com/office/drawing/2010/main" xmlns:m="http://schemas.openxmlformats.org/officeDocument/2006/math" xmlns="" val="1"/>
             </a:ext>
           </a:extLst>
         </p:spPr>
@@ -5861,7 +5862,7 @@
           </a:ln>
           <a:extLst>
             <a:ext uri="{C572A759-6A51-4108-AA02-DFA0A04FC94B}">
-              <ma14:wrappingTextBoxFlag xmlns="" xmlns:m="http://schemas.openxmlformats.org/officeDocument/2006/math" xmlns:a14="http://schemas.microsoft.com/office/drawing/2010/main" xmlns:ma14="http://schemas.microsoft.com/office/mac/drawingml/2011/main" val="1"/>
+              <ma14:wrappingTextBoxFlag xmlns:ma14="http://schemas.microsoft.com/office/mac/drawingml/2011/main" xmlns:a14="http://schemas.microsoft.com/office/drawing/2010/main" xmlns:m="http://schemas.openxmlformats.org/officeDocument/2006/math" xmlns="" val="1"/>
             </a:ext>
           </a:extLst>
         </p:spPr>
@@ -5897,7 +5898,7 @@
           </a:ln>
           <a:extLst>
             <a:ext uri="{C572A759-6A51-4108-AA02-DFA0A04FC94B}">
-              <ma14:wrappingTextBoxFlag xmlns="" xmlns:m="http://schemas.openxmlformats.org/officeDocument/2006/math" xmlns:a14="http://schemas.microsoft.com/office/drawing/2010/main" xmlns:ma14="http://schemas.microsoft.com/office/mac/drawingml/2011/main" val="1"/>
+              <ma14:wrappingTextBoxFlag xmlns:ma14="http://schemas.microsoft.com/office/mac/drawingml/2011/main" xmlns:a14="http://schemas.microsoft.com/office/drawing/2010/main" xmlns:m="http://schemas.openxmlformats.org/officeDocument/2006/math" xmlns="" val="1"/>
             </a:ext>
           </a:extLst>
         </p:spPr>
@@ -5946,7 +5947,7 @@
           </a:ln>
           <a:extLst>
             <a:ext uri="{C572A759-6A51-4108-AA02-DFA0A04FC94B}">
-              <ma14:wrappingTextBoxFlag xmlns="" xmlns:m="http://schemas.openxmlformats.org/officeDocument/2006/math" xmlns:a14="http://schemas.microsoft.com/office/drawing/2010/main" xmlns:ma14="http://schemas.microsoft.com/office/mac/drawingml/2011/main" val="1"/>
+              <ma14:wrappingTextBoxFlag xmlns:ma14="http://schemas.microsoft.com/office/mac/drawingml/2011/main" xmlns:a14="http://schemas.microsoft.com/office/drawing/2010/main" xmlns:m="http://schemas.openxmlformats.org/officeDocument/2006/math" xmlns="" val="1"/>
             </a:ext>
           </a:extLst>
         </p:spPr>
@@ -5986,7 +5987,7 @@
           </a:ln>
           <a:extLst>
             <a:ext uri="{C572A759-6A51-4108-AA02-DFA0A04FC94B}">
-              <ma14:wrappingTextBoxFlag xmlns="" xmlns:m="http://schemas.openxmlformats.org/officeDocument/2006/math" xmlns:a14="http://schemas.microsoft.com/office/drawing/2010/main" xmlns:ma14="http://schemas.microsoft.com/office/mac/drawingml/2011/main" val="1"/>
+              <ma14:wrappingTextBoxFlag xmlns:ma14="http://schemas.microsoft.com/office/mac/drawingml/2011/main" xmlns:a14="http://schemas.microsoft.com/office/drawing/2010/main" xmlns:m="http://schemas.openxmlformats.org/officeDocument/2006/math" xmlns="" val="1"/>
             </a:ext>
           </a:extLst>
         </p:spPr>
@@ -6287,7 +6288,7 @@
           </a:ln>
           <a:extLst>
             <a:ext uri="{C572A759-6A51-4108-AA02-DFA0A04FC94B}">
-              <ma14:wrappingTextBoxFlag xmlns:ma14="http://schemas.microsoft.com/office/mac/drawingml/2011/main" xmlns:a14="http://schemas.microsoft.com/office/drawing/2010/main" xmlns:m="http://schemas.openxmlformats.org/officeDocument/2006/math" xmlns="" val="1"/>
+              <ma14:wrappingTextBoxFlag xmlns="" xmlns:m="http://schemas.openxmlformats.org/officeDocument/2006/math" xmlns:a14="http://schemas.microsoft.com/office/drawing/2010/main" xmlns:ma14="http://schemas.microsoft.com/office/mac/drawingml/2011/main" val="1"/>
             </a:ext>
           </a:extLst>
         </p:spPr>
@@ -6426,7 +6427,7 @@
 </file>
 
 <file path=ppt/slides/slide15.xml><?xml version="1.0" encoding="utf-8"?>
-<p:sld xmlns:a="http://schemas.openxmlformats.org/drawingml/2006/main" xmlns:r="http://schemas.openxmlformats.org/officeDocument/2006/relationships" xmlns:p="http://schemas.openxmlformats.org/presentationml/2006/main" show="0">
+<p:sld xmlns:a="http://schemas.openxmlformats.org/drawingml/2006/main" xmlns:r="http://schemas.openxmlformats.org/officeDocument/2006/relationships" xmlns:p="http://schemas.openxmlformats.org/presentationml/2006/main">
   <p:cSld>
     <p:spTree>
       <p:nvGrpSpPr>
@@ -6444,72 +6445,61 @@
       </p:grpSpPr>
       <p:sp>
         <p:nvSpPr>
-          <p:cNvPr id="603" name="P-values"/>
+          <p:cNvPr id="3" name="TextBox 2">
+            <a:extLst>
+              <a:ext uri="{FF2B5EF4-FFF2-40B4-BE49-F238E27FC236}">
+                <a16:creationId xmlns:a16="http://schemas.microsoft.com/office/drawing/2014/main" id="{DA4E5834-3C2B-D9D6-BE70-C71867908523}"/>
+              </a:ext>
+            </a:extLst>
+          </p:cNvPr>
           <p:cNvSpPr txBox="1"/>
           <p:nvPr/>
         </p:nvSpPr>
         <p:spPr>
           <a:xfrm>
-            <a:off x="5438013" y="149605"/>
-            <a:ext cx="1113446" cy="420628"/>
-          </a:xfrm>
-          <a:prstGeom prst="rect">
-            <a:avLst/>
-          </a:prstGeom>
-          <a:ln w="12700">
-            <a:miter lim="400000"/>
-          </a:ln>
-          <a:extLst>
-            <a:ext uri="{C572A759-6A51-4108-AA02-DFA0A04FC94B}">
-              <ma14:wrappingTextBoxFlag xmlns:ma14="http://schemas.microsoft.com/office/mac/drawingml/2011/main" xmlns:a14="http://schemas.microsoft.com/office/drawing/2010/main" xmlns:m="http://schemas.openxmlformats.org/officeDocument/2006/math" xmlns="" val="1"/>
-            </a:ext>
-          </a:extLst>
-        </p:spPr>
-        <p:txBody>
-          <a:bodyPr wrap="none" lIns="25400" tIns="25400" rIns="25400" bIns="25400" anchor="ctr">
+            <a:off x="241891" y="256585"/>
+            <a:ext cx="6097772" cy="369332"/>
+          </a:xfrm>
+          <a:prstGeom prst="rect">
+            <a:avLst/>
+          </a:prstGeom>
+          <a:noFill/>
+        </p:spPr>
+        <p:txBody>
+          <a:bodyPr wrap="square">
             <a:spAutoFit/>
           </a:bodyPr>
-          <a:lstStyle>
-            <a:lvl1pPr>
-              <a:defRPr sz="4800" b="1"/>
-            </a:lvl1pPr>
-          </a:lstStyle>
-          <a:p>
-            <a:r>
-              <a:rPr sz="2400"/>
-              <a:t>P-values</a:t>
-            </a:r>
-          </a:p>
-        </p:txBody>
-      </p:sp>
-      <p:pic>
-        <p:nvPicPr>
-          <p:cNvPr id="604" name="Image" descr="Image"/>
-          <p:cNvPicPr>
-            <a:picLocks noChangeAspect="1"/>
-          </p:cNvPicPr>
-          <p:nvPr/>
-        </p:nvPicPr>
-        <p:blipFill>
-          <a:blip r:embed="rId3"/>
-          <a:stretch>
-            <a:fillRect/>
-          </a:stretch>
-        </p:blipFill>
-        <p:spPr>
-          <a:xfrm>
-            <a:off x="2702154" y="1230170"/>
-            <a:ext cx="6787692" cy="4397660"/>
-          </a:xfrm>
-          <a:prstGeom prst="rect">
-            <a:avLst/>
-          </a:prstGeom>
-          <a:ln w="12700">
-            <a:miter lim="400000"/>
-          </a:ln>
-        </p:spPr>
-      </p:pic>
+          <a:lstStyle/>
+          <a:p>
+            <a:r>
+              <a:rPr lang="en-US" dirty="0"/>
+              <a:t>https://</a:t>
+            </a:r>
+            <a:r>
+              <a:rPr lang="en-US" dirty="0" err="1"/>
+              <a:t>nf-co.re</a:t>
+            </a:r>
+            <a:r>
+              <a:rPr lang="en-US" dirty="0"/>
+              <a:t>/</a:t>
+            </a:r>
+            <a:r>
+              <a:rPr lang="en-US" dirty="0" err="1"/>
+              <a:t>rnaseq</a:t>
+            </a:r>
+            <a:r>
+              <a:rPr lang="en-US" dirty="0"/>
+              <a:t>/3.25.0/</a:t>
+            </a:r>
+          </a:p>
+        </p:txBody>
+      </p:sp>
     </p:spTree>
+    <p:extLst>
+      <p:ext uri="{BB962C8B-B14F-4D97-AF65-F5344CB8AC3E}">
+        <p14:creationId xmlns:p14="http://schemas.microsoft.com/office/powerpoint/2010/main" val="2120777793"/>
+      </p:ext>
+    </p:extLst>
   </p:cSld>
   <p:clrMapOvr>
     <a:masterClrMapping/>
@@ -6536,14 +6526,14 @@
       </p:grpSpPr>
       <p:sp>
         <p:nvSpPr>
-          <p:cNvPr id="608" name="Basic plotting and visualizing of results"/>
+          <p:cNvPr id="603" name="P-values"/>
           <p:cNvSpPr txBox="1"/>
           <p:nvPr/>
         </p:nvSpPr>
         <p:spPr>
           <a:xfrm>
-            <a:off x="3154313" y="337961"/>
-            <a:ext cx="4973477" cy="420628"/>
+            <a:off x="5438013" y="149605"/>
+            <a:ext cx="1113446" cy="420628"/>
           </a:xfrm>
           <a:prstGeom prst="rect">
             <a:avLst/>
@@ -6553,7 +6543,7 @@
           </a:ln>
           <a:extLst>
             <a:ext uri="{C572A759-6A51-4108-AA02-DFA0A04FC94B}">
-              <ma14:wrappingTextBoxFlag xmlns:ma14="http://schemas.microsoft.com/office/mac/drawingml/2011/main" xmlns:a14="http://schemas.microsoft.com/office/drawing/2010/main" xmlns:m="http://schemas.openxmlformats.org/officeDocument/2006/math" xmlns="" val="1"/>
+              <ma14:wrappingTextBoxFlag xmlns="" xmlns:m="http://schemas.openxmlformats.org/officeDocument/2006/math" xmlns:a14="http://schemas.microsoft.com/office/drawing/2010/main" xmlns:ma14="http://schemas.microsoft.com/office/mac/drawingml/2011/main" val="1"/>
             </a:ext>
           </a:extLst>
         </p:spPr>
@@ -6569,14 +6559,14 @@
           <a:p>
             <a:r>
               <a:rPr sz="2400"/>
-              <a:t>Basic plotting and visualizing of results</a:t>
+              <a:t>P-values</a:t>
             </a:r>
           </a:p>
         </p:txBody>
       </p:sp>
       <p:pic>
         <p:nvPicPr>
-          <p:cNvPr id="609" name="Image" descr="Image"/>
+          <p:cNvPr id="604" name="Image" descr="Image"/>
           <p:cNvPicPr>
             <a:picLocks noChangeAspect="1"/>
           </p:cNvPicPr>
@@ -6590,35 +6580,8 @@
         </p:blipFill>
         <p:spPr>
           <a:xfrm>
-            <a:off x="2313452" y="1102438"/>
-            <a:ext cx="7721157" cy="1592958"/>
-          </a:xfrm>
-          <a:prstGeom prst="rect">
-            <a:avLst/>
-          </a:prstGeom>
-          <a:ln w="12700">
-            <a:miter lim="400000"/>
-          </a:ln>
-        </p:spPr>
-      </p:pic>
-      <p:pic>
-        <p:nvPicPr>
-          <p:cNvPr id="610" name="Image" descr="Image"/>
-          <p:cNvPicPr>
-            <a:picLocks noChangeAspect="1"/>
-          </p:cNvPicPr>
-          <p:nvPr/>
-        </p:nvPicPr>
-        <p:blipFill>
-          <a:blip r:embed="rId4"/>
-          <a:stretch>
-            <a:fillRect/>
-          </a:stretch>
-        </p:blipFill>
-        <p:spPr>
-          <a:xfrm>
-            <a:off x="2685462" y="2800675"/>
-            <a:ext cx="6466526" cy="3496494"/>
+            <a:off x="2702154" y="1230170"/>
+            <a:ext cx="6787692" cy="4397660"/>
           </a:xfrm>
           <a:prstGeom prst="rect">
             <a:avLst/>
@@ -6653,36 +6616,9 @@
           <a:chExt cx="0" cy="0"/>
         </a:xfrm>
       </p:grpSpPr>
-      <p:pic>
-        <p:nvPicPr>
-          <p:cNvPr id="614" name="Image" descr="Image"/>
-          <p:cNvPicPr>
-            <a:picLocks noChangeAspect="1"/>
-          </p:cNvPicPr>
-          <p:nvPr/>
-        </p:nvPicPr>
-        <p:blipFill>
-          <a:blip r:embed="rId2"/>
-          <a:stretch>
-            <a:fillRect/>
-          </a:stretch>
-        </p:blipFill>
-        <p:spPr>
-          <a:xfrm>
-            <a:off x="6971615" y="1540727"/>
-            <a:ext cx="4076701" cy="3200401"/>
-          </a:xfrm>
-          <a:prstGeom prst="rect">
-            <a:avLst/>
-          </a:prstGeom>
-          <a:ln w="12700">
-            <a:miter lim="400000"/>
-          </a:ln>
-        </p:spPr>
-      </p:pic>
-      <p:sp>
-        <p:nvSpPr>
-          <p:cNvPr id="615" name="Basic plotting and visualizing of results"/>
+      <p:sp>
+        <p:nvSpPr>
+          <p:cNvPr id="608" name="Basic plotting and visualizing of results"/>
           <p:cNvSpPr txBox="1"/>
           <p:nvPr/>
         </p:nvSpPr>
@@ -6699,7 +6635,7 @@
           </a:ln>
           <a:extLst>
             <a:ext uri="{C572A759-6A51-4108-AA02-DFA0A04FC94B}">
-              <ma14:wrappingTextBoxFlag xmlns:ma14="http://schemas.microsoft.com/office/mac/drawingml/2011/main" xmlns:a14="http://schemas.microsoft.com/office/drawing/2010/main" xmlns:m="http://schemas.openxmlformats.org/officeDocument/2006/math" xmlns="" val="1"/>
+              <ma14:wrappingTextBoxFlag xmlns="" xmlns:m="http://schemas.openxmlformats.org/officeDocument/2006/math" xmlns:a14="http://schemas.microsoft.com/office/drawing/2010/main" xmlns:ma14="http://schemas.microsoft.com/office/mac/drawingml/2011/main" val="1"/>
             </a:ext>
           </a:extLst>
         </p:spPr>
@@ -6722,7 +6658,7 @@
       </p:sp>
       <p:pic>
         <p:nvPicPr>
-          <p:cNvPr id="616" name="Image" descr="Image"/>
+          <p:cNvPr id="609" name="Image" descr="Image"/>
           <p:cNvPicPr>
             <a:picLocks noChangeAspect="1"/>
           </p:cNvPicPr>
@@ -6736,8 +6672,8 @@
         </p:blipFill>
         <p:spPr>
           <a:xfrm>
-            <a:off x="702193" y="1898435"/>
-            <a:ext cx="5661352" cy="3061131"/>
+            <a:off x="2313452" y="1102438"/>
+            <a:ext cx="7721157" cy="1592958"/>
           </a:xfrm>
           <a:prstGeom prst="rect">
             <a:avLst/>
@@ -6747,16 +6683,24 @@
           </a:ln>
         </p:spPr>
       </p:pic>
-      <p:sp>
-        <p:nvSpPr>
-          <p:cNvPr id="617" name="Initial"/>
-          <p:cNvSpPr txBox="1"/>
-          <p:nvPr/>
-        </p:nvSpPr>
-        <p:spPr>
-          <a:xfrm>
-            <a:off x="3577833" y="1713694"/>
-            <a:ext cx="597921" cy="328295"/>
+      <p:pic>
+        <p:nvPicPr>
+          <p:cNvPr id="610" name="Image" descr="Image"/>
+          <p:cNvPicPr>
+            <a:picLocks noChangeAspect="1"/>
+          </p:cNvPicPr>
+          <p:nvPr/>
+        </p:nvPicPr>
+        <p:blipFill>
+          <a:blip r:embed="rId4"/>
+          <a:stretch>
+            <a:fillRect/>
+          </a:stretch>
+        </p:blipFill>
+        <p:spPr>
+          <a:xfrm>
+            <a:off x="2685462" y="2800675"/>
+            <a:ext cx="6466526" cy="3496494"/>
           </a:xfrm>
           <a:prstGeom prst="rect">
             <a:avLst/>
@@ -6764,69 +6708,8 @@
           <a:ln w="12700">
             <a:miter lim="400000"/>
           </a:ln>
-          <a:extLst>
-            <a:ext uri="{C572A759-6A51-4108-AA02-DFA0A04FC94B}">
-              <ma14:wrappingTextBoxFlag xmlns:ma14="http://schemas.microsoft.com/office/mac/drawingml/2011/main" xmlns:a14="http://schemas.microsoft.com/office/drawing/2010/main" xmlns:m="http://schemas.openxmlformats.org/officeDocument/2006/math" xmlns="" val="1"/>
-            </a:ext>
-          </a:extLst>
-        </p:spPr>
-        <p:txBody>
-          <a:bodyPr wrap="none" lIns="25400" tIns="25400" rIns="25400" bIns="25400" anchor="ctr">
-            <a:spAutoFit/>
-          </a:bodyPr>
-          <a:lstStyle>
-            <a:lvl1pPr>
-              <a:defRPr sz="3600" b="1"/>
-            </a:lvl1pPr>
-          </a:lstStyle>
-          <a:p>
-            <a:r>
-              <a:rPr sz="1800"/>
-              <a:t>Initial</a:t>
-            </a:r>
-          </a:p>
-        </p:txBody>
-      </p:sp>
-      <p:sp>
-        <p:nvSpPr>
-          <p:cNvPr id="618" name="Shrunk"/>
-          <p:cNvSpPr txBox="1"/>
-          <p:nvPr/>
-        </p:nvSpPr>
-        <p:spPr>
-          <a:xfrm>
-            <a:off x="8867814" y="1713694"/>
-            <a:ext cx="722955" cy="328295"/>
-          </a:xfrm>
-          <a:prstGeom prst="rect">
-            <a:avLst/>
-          </a:prstGeom>
-          <a:ln w="12700">
-            <a:miter lim="400000"/>
-          </a:ln>
-          <a:extLst>
-            <a:ext uri="{C572A759-6A51-4108-AA02-DFA0A04FC94B}">
-              <ma14:wrappingTextBoxFlag xmlns:ma14="http://schemas.microsoft.com/office/mac/drawingml/2011/main" xmlns:a14="http://schemas.microsoft.com/office/drawing/2010/main" xmlns:m="http://schemas.openxmlformats.org/officeDocument/2006/math" xmlns="" val="1"/>
-            </a:ext>
-          </a:extLst>
-        </p:spPr>
-        <p:txBody>
-          <a:bodyPr wrap="none" lIns="25400" tIns="25400" rIns="25400" bIns="25400" anchor="ctr">
-            <a:spAutoFit/>
-          </a:bodyPr>
-          <a:lstStyle>
-            <a:lvl1pPr>
-              <a:defRPr sz="3600" b="1"/>
-            </a:lvl1pPr>
-          </a:lstStyle>
-          <a:p>
-            <a:r>
-              <a:rPr sz="1800"/>
-              <a:t>Shrunk</a:t>
-            </a:r>
-          </a:p>
-        </p:txBody>
-      </p:sp>
+        </p:spPr>
+      </p:pic>
     </p:spTree>
   </p:cSld>
   <p:clrMapOvr>
@@ -6852,9 +6735,36 @@
           <a:chExt cx="0" cy="0"/>
         </a:xfrm>
       </p:grpSpPr>
-      <p:sp>
-        <p:nvSpPr>
-          <p:cNvPr id="620" name="Basic plotting and visualizing of results"/>
+      <p:pic>
+        <p:nvPicPr>
+          <p:cNvPr id="614" name="Image" descr="Image"/>
+          <p:cNvPicPr>
+            <a:picLocks noChangeAspect="1"/>
+          </p:cNvPicPr>
+          <p:nvPr/>
+        </p:nvPicPr>
+        <p:blipFill>
+          <a:blip r:embed="rId2"/>
+          <a:stretch>
+            <a:fillRect/>
+          </a:stretch>
+        </p:blipFill>
+        <p:spPr>
+          <a:xfrm>
+            <a:off x="6971615" y="1540727"/>
+            <a:ext cx="4076701" cy="3200401"/>
+          </a:xfrm>
+          <a:prstGeom prst="rect">
+            <a:avLst/>
+          </a:prstGeom>
+          <a:ln w="12700">
+            <a:miter lim="400000"/>
+          </a:ln>
+        </p:spPr>
+      </p:pic>
+      <p:sp>
+        <p:nvSpPr>
+          <p:cNvPr id="615" name="Basic plotting and visualizing of results"/>
           <p:cNvSpPr txBox="1"/>
           <p:nvPr/>
         </p:nvSpPr>
@@ -6871,7 +6781,7 @@
           </a:ln>
           <a:extLst>
             <a:ext uri="{C572A759-6A51-4108-AA02-DFA0A04FC94B}">
-              <ma14:wrappingTextBoxFlag xmlns:ma14="http://schemas.microsoft.com/office/mac/drawingml/2011/main" xmlns:a14="http://schemas.microsoft.com/office/drawing/2010/main" xmlns:m="http://schemas.openxmlformats.org/officeDocument/2006/math" xmlns="" val="1"/>
+              <ma14:wrappingTextBoxFlag xmlns="" xmlns:m="http://schemas.openxmlformats.org/officeDocument/2006/math" xmlns:a14="http://schemas.microsoft.com/office/drawing/2010/main" xmlns:ma14="http://schemas.microsoft.com/office/mac/drawingml/2011/main" val="1"/>
             </a:ext>
           </a:extLst>
         </p:spPr>
@@ -6892,16 +6802,43 @@
           </a:p>
         </p:txBody>
       </p:sp>
-      <p:sp>
-        <p:nvSpPr>
-          <p:cNvPr id="621" name="VolcanoPlot"/>
+      <p:pic>
+        <p:nvPicPr>
+          <p:cNvPr id="616" name="Image" descr="Image"/>
+          <p:cNvPicPr>
+            <a:picLocks noChangeAspect="1"/>
+          </p:cNvPicPr>
+          <p:nvPr/>
+        </p:nvPicPr>
+        <p:blipFill>
+          <a:blip r:embed="rId3"/>
+          <a:stretch>
+            <a:fillRect/>
+          </a:stretch>
+        </p:blipFill>
+        <p:spPr>
+          <a:xfrm>
+            <a:off x="702193" y="1898435"/>
+            <a:ext cx="5661352" cy="3061131"/>
+          </a:xfrm>
+          <a:prstGeom prst="rect">
+            <a:avLst/>
+          </a:prstGeom>
+          <a:ln w="12700">
+            <a:miter lim="400000"/>
+          </a:ln>
+        </p:spPr>
+      </p:pic>
+      <p:sp>
+        <p:nvSpPr>
+          <p:cNvPr id="617" name="Initial"/>
           <p:cNvSpPr txBox="1"/>
           <p:nvPr/>
         </p:nvSpPr>
         <p:spPr>
           <a:xfrm>
-            <a:off x="8032556" y="1425621"/>
-            <a:ext cx="1195007" cy="328295"/>
+            <a:off x="3577833" y="1713694"/>
+            <a:ext cx="597921" cy="328295"/>
           </a:xfrm>
           <a:prstGeom prst="rect">
             <a:avLst/>
@@ -6911,7 +6848,7 @@
           </a:ln>
           <a:extLst>
             <a:ext uri="{C572A759-6A51-4108-AA02-DFA0A04FC94B}">
-              <ma14:wrappingTextBoxFlag xmlns:ma14="http://schemas.microsoft.com/office/mac/drawingml/2011/main" xmlns:a14="http://schemas.microsoft.com/office/drawing/2010/main" xmlns:m="http://schemas.openxmlformats.org/officeDocument/2006/math" xmlns="" val="1"/>
+              <ma14:wrappingTextBoxFlag xmlns="" xmlns:m="http://schemas.openxmlformats.org/officeDocument/2006/math" xmlns:a14="http://schemas.microsoft.com/office/drawing/2010/main" xmlns:ma14="http://schemas.microsoft.com/office/mac/drawingml/2011/main" val="1"/>
             </a:ext>
           </a:extLst>
         </p:spPr>
@@ -6927,74 +6864,20 @@
           <a:p>
             <a:r>
               <a:rPr sz="1800"/>
-              <a:t>VolcanoPlot</a:t>
-            </a:r>
-          </a:p>
-        </p:txBody>
-      </p:sp>
-      <p:pic>
-        <p:nvPicPr>
-          <p:cNvPr id="622" name="Image" descr="Image"/>
-          <p:cNvPicPr>
-            <a:picLocks noChangeAspect="1"/>
-          </p:cNvPicPr>
-          <p:nvPr/>
-        </p:nvPicPr>
-        <p:blipFill>
-          <a:blip r:embed="rId2"/>
-          <a:stretch>
-            <a:fillRect/>
-          </a:stretch>
-        </p:blipFill>
-        <p:spPr>
-          <a:xfrm>
-            <a:off x="6608154" y="1741477"/>
-            <a:ext cx="4485379" cy="3978834"/>
-          </a:xfrm>
-          <a:prstGeom prst="rect">
-            <a:avLst/>
-          </a:prstGeom>
-          <a:ln w="12700">
-            <a:miter lim="400000"/>
-          </a:ln>
-        </p:spPr>
-      </p:pic>
-      <p:pic>
-        <p:nvPicPr>
-          <p:cNvPr id="623" name="Image" descr="Image"/>
-          <p:cNvPicPr>
-            <a:picLocks noChangeAspect="1"/>
-          </p:cNvPicPr>
-          <p:nvPr/>
-        </p:nvPicPr>
-        <p:blipFill>
-          <a:blip r:embed="rId3"/>
-          <a:stretch>
-            <a:fillRect/>
-          </a:stretch>
-        </p:blipFill>
-        <p:spPr>
-          <a:xfrm>
-            <a:off x="691388" y="1679166"/>
-            <a:ext cx="5227020" cy="4103455"/>
-          </a:xfrm>
-          <a:prstGeom prst="rect">
-            <a:avLst/>
-          </a:prstGeom>
-          <a:ln w="12700">
-            <a:miter lim="400000"/>
-          </a:ln>
-        </p:spPr>
-      </p:pic>
-      <p:sp>
-        <p:nvSpPr>
-          <p:cNvPr id="624" name="Shrunk"/>
+              <a:t>Initial</a:t>
+            </a:r>
+          </a:p>
+        </p:txBody>
+      </p:sp>
+      <p:sp>
+        <p:nvSpPr>
+          <p:cNvPr id="618" name="Shrunk"/>
           <p:cNvSpPr txBox="1"/>
           <p:nvPr/>
         </p:nvSpPr>
         <p:spPr>
           <a:xfrm>
-            <a:off x="3073123" y="1890969"/>
+            <a:off x="8867814" y="1713694"/>
             <a:ext cx="722955" cy="328295"/>
           </a:xfrm>
           <a:prstGeom prst="rect">
@@ -7005,7 +6888,7 @@
           </a:ln>
           <a:extLst>
             <a:ext uri="{C572A759-6A51-4108-AA02-DFA0A04FC94B}">
-              <ma14:wrappingTextBoxFlag xmlns:ma14="http://schemas.microsoft.com/office/mac/drawingml/2011/main" xmlns:a14="http://schemas.microsoft.com/office/drawing/2010/main" xmlns:m="http://schemas.openxmlformats.org/officeDocument/2006/math" xmlns="" val="1"/>
+              <ma14:wrappingTextBoxFlag xmlns="" xmlns:m="http://schemas.openxmlformats.org/officeDocument/2006/math" xmlns:a14="http://schemas.microsoft.com/office/drawing/2010/main" xmlns:ma14="http://schemas.microsoft.com/office/mac/drawingml/2011/main" val="1"/>
             </a:ext>
           </a:extLst>
         </p:spPr>
@@ -7035,7 +6918,7 @@
 </file>
 
 <file path=ppt/slides/slide19.xml><?xml version="1.0" encoding="utf-8"?>
-<p:sld xmlns:a="http://schemas.openxmlformats.org/drawingml/2006/main" xmlns:r="http://schemas.openxmlformats.org/officeDocument/2006/relationships" xmlns:p="http://schemas.openxmlformats.org/presentationml/2006/main">
+<p:sld xmlns:a="http://schemas.openxmlformats.org/drawingml/2006/main" xmlns:r="http://schemas.openxmlformats.org/officeDocument/2006/relationships" xmlns:p="http://schemas.openxmlformats.org/presentationml/2006/main" show="0">
   <p:cSld>
     <p:spTree>
       <p:nvGrpSpPr>
@@ -7053,7 +6936,7 @@
       </p:grpSpPr>
       <p:sp>
         <p:nvSpPr>
-          <p:cNvPr id="626" name="Basic plotting and visualizing of results"/>
+          <p:cNvPr id="620" name="Basic plotting and visualizing of results"/>
           <p:cNvSpPr txBox="1"/>
           <p:nvPr/>
         </p:nvSpPr>
@@ -7070,7 +6953,7 @@
           </a:ln>
           <a:extLst>
             <a:ext uri="{C572A759-6A51-4108-AA02-DFA0A04FC94B}">
-              <ma14:wrappingTextBoxFlag xmlns:ma14="http://schemas.microsoft.com/office/mac/drawingml/2011/main" xmlns:a14="http://schemas.microsoft.com/office/drawing/2010/main" xmlns:m="http://schemas.openxmlformats.org/officeDocument/2006/math" xmlns="" val="1"/>
+              <ma14:wrappingTextBoxFlag xmlns="" xmlns:m="http://schemas.openxmlformats.org/officeDocument/2006/math" xmlns:a14="http://schemas.microsoft.com/office/drawing/2010/main" xmlns:ma14="http://schemas.microsoft.com/office/mac/drawingml/2011/main" val="1"/>
             </a:ext>
           </a:extLst>
         </p:spPr>
@@ -7091,15 +6974,49 @@
           </a:p>
         </p:txBody>
       </p:sp>
+      <p:sp>
+        <p:nvSpPr>
+          <p:cNvPr id="621" name="VolcanoPlot"/>
+          <p:cNvSpPr txBox="1"/>
+          <p:nvPr/>
+        </p:nvSpPr>
+        <p:spPr>
+          <a:xfrm>
+            <a:off x="8032556" y="1425621"/>
+            <a:ext cx="1195007" cy="328295"/>
+          </a:xfrm>
+          <a:prstGeom prst="rect">
+            <a:avLst/>
+          </a:prstGeom>
+          <a:ln w="12700">
+            <a:miter lim="400000"/>
+          </a:ln>
+          <a:extLst>
+            <a:ext uri="{C572A759-6A51-4108-AA02-DFA0A04FC94B}">
+              <ma14:wrappingTextBoxFlag xmlns="" xmlns:m="http://schemas.openxmlformats.org/officeDocument/2006/math" xmlns:a14="http://schemas.microsoft.com/office/drawing/2010/main" xmlns:ma14="http://schemas.microsoft.com/office/mac/drawingml/2011/main" val="1"/>
+            </a:ext>
+          </a:extLst>
+        </p:spPr>
+        <p:txBody>
+          <a:bodyPr wrap="none" lIns="25400" tIns="25400" rIns="25400" bIns="25400" anchor="ctr">
+            <a:spAutoFit/>
+          </a:bodyPr>
+          <a:lstStyle>
+            <a:lvl1pPr>
+              <a:defRPr sz="3600" b="1"/>
+            </a:lvl1pPr>
+          </a:lstStyle>
+          <a:p>
+            <a:r>
+              <a:rPr sz="1800"/>
+              <a:t>VolcanoPlot</a:t>
+            </a:r>
+          </a:p>
+        </p:txBody>
+      </p:sp>
       <p:pic>
         <p:nvPicPr>
-          <p:cNvPr id="2" name="Picture 1">
-            <a:extLst>
-              <a:ext uri="{FF2B5EF4-FFF2-40B4-BE49-F238E27FC236}">
-                <a16:creationId xmlns:a16="http://schemas.microsoft.com/office/drawing/2014/main" id="{9DAEACFF-D776-6844-B46B-89298D783AA4}"/>
-              </a:ext>
-            </a:extLst>
-          </p:cNvPr>
+          <p:cNvPr id="622" name="Image" descr="Image"/>
           <p:cNvPicPr>
             <a:picLocks noChangeAspect="1"/>
           </p:cNvPicPr>
@@ -7113,23 +7030,20 @@
         </p:blipFill>
         <p:spPr>
           <a:xfrm>
-            <a:off x="510278" y="1568295"/>
-            <a:ext cx="3585861" cy="3209445"/>
-          </a:xfrm>
-          <a:prstGeom prst="rect">
-            <a:avLst/>
-          </a:prstGeom>
+            <a:off x="6608154" y="1741477"/>
+            <a:ext cx="4485379" cy="3978834"/>
+          </a:xfrm>
+          <a:prstGeom prst="rect">
+            <a:avLst/>
+          </a:prstGeom>
+          <a:ln w="12700">
+            <a:miter lim="400000"/>
+          </a:ln>
         </p:spPr>
       </p:pic>
       <p:pic>
         <p:nvPicPr>
-          <p:cNvPr id="3" name="Picture 2">
-            <a:extLst>
-              <a:ext uri="{FF2B5EF4-FFF2-40B4-BE49-F238E27FC236}">
-                <a16:creationId xmlns:a16="http://schemas.microsoft.com/office/drawing/2014/main" id="{715408E3-409B-E569-DD26-3251462B6A15}"/>
-              </a:ext>
-            </a:extLst>
-          </p:cNvPr>
+          <p:cNvPr id="623" name="Image" descr="Image"/>
           <p:cNvPicPr>
             <a:picLocks noChangeAspect="1"/>
           </p:cNvPicPr>
@@ -7143,74 +7057,57 @@
         </p:blipFill>
         <p:spPr>
           <a:xfrm>
-            <a:off x="1836420" y="5522742"/>
-            <a:ext cx="7772400" cy="597876"/>
-          </a:xfrm>
-          <a:prstGeom prst="rect">
-            <a:avLst/>
-          </a:prstGeom>
+            <a:off x="691388" y="1679166"/>
+            <a:ext cx="5227020" cy="4103455"/>
+          </a:xfrm>
+          <a:prstGeom prst="rect">
+            <a:avLst/>
+          </a:prstGeom>
+          <a:ln w="12700">
+            <a:miter lim="400000"/>
+          </a:ln>
         </p:spPr>
       </p:pic>
-      <p:pic>
-        <p:nvPicPr>
-          <p:cNvPr id="4" name="Picture 3">
-            <a:extLst>
-              <a:ext uri="{FF2B5EF4-FFF2-40B4-BE49-F238E27FC236}">
-                <a16:creationId xmlns:a16="http://schemas.microsoft.com/office/drawing/2014/main" id="{F032AF7C-1636-E7C5-6C4D-D4D6A5752843}"/>
-              </a:ext>
-            </a:extLst>
-          </p:cNvPr>
-          <p:cNvPicPr>
-            <a:picLocks noChangeAspect="1"/>
-          </p:cNvPicPr>
-          <p:nvPr/>
-        </p:nvPicPr>
-        <p:blipFill>
-          <a:blip r:embed="rId4"/>
-          <a:stretch>
-            <a:fillRect/>
-          </a:stretch>
-        </p:blipFill>
-        <p:spPr>
-          <a:xfrm>
-            <a:off x="4096139" y="1568294"/>
-            <a:ext cx="3566878" cy="3138325"/>
-          </a:xfrm>
-          <a:prstGeom prst="rect">
-            <a:avLst/>
-          </a:prstGeom>
-        </p:spPr>
-      </p:pic>
-      <p:pic>
-        <p:nvPicPr>
-          <p:cNvPr id="5" name="Picture 4">
-            <a:extLst>
-              <a:ext uri="{FF2B5EF4-FFF2-40B4-BE49-F238E27FC236}">
-                <a16:creationId xmlns:a16="http://schemas.microsoft.com/office/drawing/2014/main" id="{B37C4D28-C48C-0C81-9CEA-AF1AA4740D85}"/>
-              </a:ext>
-            </a:extLst>
-          </p:cNvPr>
-          <p:cNvPicPr>
-            <a:picLocks noChangeAspect="1"/>
-          </p:cNvPicPr>
-          <p:nvPr/>
-        </p:nvPicPr>
-        <p:blipFill>
-          <a:blip r:embed="rId5"/>
-          <a:stretch>
-            <a:fillRect/>
-          </a:stretch>
-        </p:blipFill>
-        <p:spPr>
-          <a:xfrm>
-            <a:off x="7827004" y="1568294"/>
-            <a:ext cx="3666162" cy="3067605"/>
-          </a:xfrm>
-          <a:prstGeom prst="rect">
-            <a:avLst/>
-          </a:prstGeom>
-        </p:spPr>
-      </p:pic>
+      <p:sp>
+        <p:nvSpPr>
+          <p:cNvPr id="624" name="Shrunk"/>
+          <p:cNvSpPr txBox="1"/>
+          <p:nvPr/>
+        </p:nvSpPr>
+        <p:spPr>
+          <a:xfrm>
+            <a:off x="3073123" y="1890969"/>
+            <a:ext cx="722955" cy="328295"/>
+          </a:xfrm>
+          <a:prstGeom prst="rect">
+            <a:avLst/>
+          </a:prstGeom>
+          <a:ln w="12700">
+            <a:miter lim="400000"/>
+          </a:ln>
+          <a:extLst>
+            <a:ext uri="{C572A759-6A51-4108-AA02-DFA0A04FC94B}">
+              <ma14:wrappingTextBoxFlag xmlns="" xmlns:m="http://schemas.openxmlformats.org/officeDocument/2006/math" xmlns:a14="http://schemas.microsoft.com/office/drawing/2010/main" xmlns:ma14="http://schemas.microsoft.com/office/mac/drawingml/2011/main" val="1"/>
+            </a:ext>
+          </a:extLst>
+        </p:spPr>
+        <p:txBody>
+          <a:bodyPr wrap="none" lIns="25400" tIns="25400" rIns="25400" bIns="25400" anchor="ctr">
+            <a:spAutoFit/>
+          </a:bodyPr>
+          <a:lstStyle>
+            <a:lvl1pPr>
+              <a:defRPr sz="3600" b="1"/>
+            </a:lvl1pPr>
+          </a:lstStyle>
+          <a:p>
+            <a:r>
+              <a:rPr sz="1800"/>
+              <a:t>Shrunk</a:t>
+            </a:r>
+          </a:p>
+        </p:txBody>
+      </p:sp>
     </p:spTree>
   </p:cSld>
   <p:clrMapOvr>
@@ -7255,7 +7152,7 @@
           </a:ln>
           <a:extLst>
             <a:ext uri="{C572A759-6A51-4108-AA02-DFA0A04FC94B}">
-              <ma14:wrappingTextBoxFlag xmlns:ma14="http://schemas.microsoft.com/office/mac/drawingml/2011/main" xmlns:a14="http://schemas.microsoft.com/office/drawing/2010/main" xmlns:m="http://schemas.openxmlformats.org/officeDocument/2006/math" xmlns="" val="1"/>
+              <ma14:wrappingTextBoxFlag xmlns="" xmlns:m="http://schemas.openxmlformats.org/officeDocument/2006/math" xmlns:a14="http://schemas.microsoft.com/office/drawing/2010/main" xmlns:ma14="http://schemas.microsoft.com/office/mac/drawingml/2011/main" val="1"/>
             </a:ext>
           </a:extLst>
         </p:spPr>
@@ -7301,7 +7198,7 @@
           </a:ln>
           <a:extLst>
             <a:ext uri="{C572A759-6A51-4108-AA02-DFA0A04FC94B}">
-              <ma14:wrappingTextBoxFlag xmlns:ma14="http://schemas.microsoft.com/office/mac/drawingml/2011/main" xmlns:a14="http://schemas.microsoft.com/office/drawing/2010/main" xmlns:m="http://schemas.openxmlformats.org/officeDocument/2006/math" xmlns="" val="1"/>
+              <ma14:wrappingTextBoxFlag xmlns="" xmlns:m="http://schemas.openxmlformats.org/officeDocument/2006/math" xmlns:a14="http://schemas.microsoft.com/office/drawing/2010/main" xmlns:ma14="http://schemas.microsoft.com/office/mac/drawingml/2011/main" val="1"/>
             </a:ext>
           </a:extLst>
         </p:spPr>
@@ -7354,7 +7251,7 @@
           </a:ln>
           <a:extLst>
             <a:ext uri="{C572A759-6A51-4108-AA02-DFA0A04FC94B}">
-              <ma14:wrappingTextBoxFlag xmlns:ma14="http://schemas.microsoft.com/office/mac/drawingml/2011/main" xmlns:a14="http://schemas.microsoft.com/office/drawing/2010/main" xmlns:m="http://schemas.openxmlformats.org/officeDocument/2006/math" xmlns="" val="1"/>
+              <ma14:wrappingTextBoxFlag xmlns="" xmlns:m="http://schemas.openxmlformats.org/officeDocument/2006/math" xmlns:a14="http://schemas.microsoft.com/office/drawing/2010/main" xmlns:ma14="http://schemas.microsoft.com/office/mac/drawingml/2011/main" val="1"/>
             </a:ext>
           </a:extLst>
         </p:spPr>
@@ -7411,7 +7308,7 @@
       </p:grpSpPr>
       <p:sp>
         <p:nvSpPr>
-          <p:cNvPr id="632" name="Basic plotting and visualizing of results"/>
+          <p:cNvPr id="626" name="Basic plotting and visualizing of results"/>
           <p:cNvSpPr txBox="1"/>
           <p:nvPr/>
         </p:nvSpPr>
@@ -7428,7 +7325,7 @@
           </a:ln>
           <a:extLst>
             <a:ext uri="{C572A759-6A51-4108-AA02-DFA0A04FC94B}">
-              <ma14:wrappingTextBoxFlag xmlns:ma14="http://schemas.microsoft.com/office/mac/drawingml/2011/main" xmlns:a14="http://schemas.microsoft.com/office/drawing/2010/main" xmlns:m="http://schemas.openxmlformats.org/officeDocument/2006/math" xmlns="" val="1"/>
+              <ma14:wrappingTextBoxFlag xmlns="" xmlns:m="http://schemas.openxmlformats.org/officeDocument/2006/math" xmlns:a14="http://schemas.microsoft.com/office/drawing/2010/main" xmlns:ma14="http://schemas.microsoft.com/office/mac/drawingml/2011/main" val="1"/>
             </a:ext>
           </a:extLst>
         </p:spPr>
@@ -7454,7 +7351,37 @@
           <p:cNvPr id="2" name="Picture 1">
             <a:extLst>
               <a:ext uri="{FF2B5EF4-FFF2-40B4-BE49-F238E27FC236}">
-                <a16:creationId xmlns:a16="http://schemas.microsoft.com/office/drawing/2014/main" id="{B00F4044-0E9E-6F48-DE99-0DC85132FB60}"/>
+                <a16:creationId xmlns:a16="http://schemas.microsoft.com/office/drawing/2014/main" id="{9DAEACFF-D776-6844-B46B-89298D783AA4}"/>
+              </a:ext>
+            </a:extLst>
+          </p:cNvPr>
+          <p:cNvPicPr>
+            <a:picLocks noChangeAspect="1"/>
+          </p:cNvPicPr>
+          <p:nvPr/>
+        </p:nvPicPr>
+        <p:blipFill>
+          <a:blip r:embed="rId2"/>
+          <a:stretch>
+            <a:fillRect/>
+          </a:stretch>
+        </p:blipFill>
+        <p:spPr>
+          <a:xfrm>
+            <a:off x="510278" y="1568295"/>
+            <a:ext cx="3585861" cy="3209445"/>
+          </a:xfrm>
+          <a:prstGeom prst="rect">
+            <a:avLst/>
+          </a:prstGeom>
+        </p:spPr>
+      </p:pic>
+      <p:pic>
+        <p:nvPicPr>
+          <p:cNvPr id="3" name="Picture 2">
+            <a:extLst>
+              <a:ext uri="{FF2B5EF4-FFF2-40B4-BE49-F238E27FC236}">
+                <a16:creationId xmlns:a16="http://schemas.microsoft.com/office/drawing/2014/main" id="{715408E3-409B-E569-DD26-3251462B6A15}"/>
               </a:ext>
             </a:extLst>
           </p:cNvPr>
@@ -7471,8 +7398,8 @@
         </p:blipFill>
         <p:spPr>
           <a:xfrm>
-            <a:off x="822960" y="1251278"/>
-            <a:ext cx="3939540" cy="1010301"/>
+            <a:off x="1836420" y="5522742"/>
+            <a:ext cx="7772400" cy="597876"/>
           </a:xfrm>
           <a:prstGeom prst="rect">
             <a:avLst/>
@@ -7481,10 +7408,10 @@
       </p:pic>
       <p:pic>
         <p:nvPicPr>
-          <p:cNvPr id="3" name="Picture 2">
-            <a:extLst>
-              <a:ext uri="{FF2B5EF4-FFF2-40B4-BE49-F238E27FC236}">
-                <a16:creationId xmlns:a16="http://schemas.microsoft.com/office/drawing/2014/main" id="{10EBA9A2-F894-2989-2B93-A95D6AD68BC9}"/>
+          <p:cNvPr id="4" name="Picture 3">
+            <a:extLst>
+              <a:ext uri="{FF2B5EF4-FFF2-40B4-BE49-F238E27FC236}">
+                <a16:creationId xmlns:a16="http://schemas.microsoft.com/office/drawing/2014/main" id="{F032AF7C-1636-E7C5-6C4D-D4D6A5752843}"/>
               </a:ext>
             </a:extLst>
           </p:cNvPr>
@@ -7501,8 +7428,38 @@
         </p:blipFill>
         <p:spPr>
           <a:xfrm>
-            <a:off x="5334765" y="1251278"/>
-            <a:ext cx="5586049" cy="3836381"/>
+            <a:off x="4096139" y="1568294"/>
+            <a:ext cx="3566878" cy="3138325"/>
+          </a:xfrm>
+          <a:prstGeom prst="rect">
+            <a:avLst/>
+          </a:prstGeom>
+        </p:spPr>
+      </p:pic>
+      <p:pic>
+        <p:nvPicPr>
+          <p:cNvPr id="5" name="Picture 4">
+            <a:extLst>
+              <a:ext uri="{FF2B5EF4-FFF2-40B4-BE49-F238E27FC236}">
+                <a16:creationId xmlns:a16="http://schemas.microsoft.com/office/drawing/2014/main" id="{B37C4D28-C48C-0C81-9CEA-AF1AA4740D85}"/>
+              </a:ext>
+            </a:extLst>
+          </p:cNvPr>
+          <p:cNvPicPr>
+            <a:picLocks noChangeAspect="1"/>
+          </p:cNvPicPr>
+          <p:nvPr/>
+        </p:nvPicPr>
+        <p:blipFill>
+          <a:blip r:embed="rId5"/>
+          <a:stretch>
+            <a:fillRect/>
+          </a:stretch>
+        </p:blipFill>
+        <p:spPr>
+          <a:xfrm>
+            <a:off x="7827004" y="1568294"/>
+            <a:ext cx="3666162" cy="3067605"/>
           </a:xfrm>
           <a:prstGeom prst="rect">
             <a:avLst/>
@@ -7536,7 +7493,7 @@
       </p:grpSpPr>
       <p:sp>
         <p:nvSpPr>
-          <p:cNvPr id="637" name="Basic plotting and visualizing of results"/>
+          <p:cNvPr id="632" name="Basic plotting and visualizing of results"/>
           <p:cNvSpPr txBox="1"/>
           <p:nvPr/>
         </p:nvSpPr>
@@ -7553,7 +7510,7 @@
           </a:ln>
           <a:extLst>
             <a:ext uri="{C572A759-6A51-4108-AA02-DFA0A04FC94B}">
-              <ma14:wrappingTextBoxFlag xmlns:ma14="http://schemas.microsoft.com/office/mac/drawingml/2011/main" xmlns:a14="http://schemas.microsoft.com/office/drawing/2010/main" xmlns:m="http://schemas.openxmlformats.org/officeDocument/2006/math" xmlns="" val="1"/>
+              <ma14:wrappingTextBoxFlag xmlns="" xmlns:m="http://schemas.openxmlformats.org/officeDocument/2006/math" xmlns:a14="http://schemas.microsoft.com/office/drawing/2010/main" xmlns:ma14="http://schemas.microsoft.com/office/mac/drawingml/2011/main" val="1"/>
             </a:ext>
           </a:extLst>
         </p:spPr>
@@ -7579,7 +7536,7 @@
           <p:cNvPr id="2" name="Picture 1">
             <a:extLst>
               <a:ext uri="{FF2B5EF4-FFF2-40B4-BE49-F238E27FC236}">
-                <a16:creationId xmlns:a16="http://schemas.microsoft.com/office/drawing/2014/main" id="{AE285BDD-5369-A9B0-960F-93FFE3F9BDAF}"/>
+                <a16:creationId xmlns:a16="http://schemas.microsoft.com/office/drawing/2014/main" id="{B00F4044-0E9E-6F48-DE99-0DC85132FB60}"/>
               </a:ext>
             </a:extLst>
           </p:cNvPr>
@@ -7596,8 +7553,8 @@
         </p:blipFill>
         <p:spPr>
           <a:xfrm>
-            <a:off x="4872992" y="1376677"/>
-            <a:ext cx="6316980" cy="4104645"/>
+            <a:off x="822960" y="1251278"/>
+            <a:ext cx="3939540" cy="1010301"/>
           </a:xfrm>
           <a:prstGeom prst="rect">
             <a:avLst/>
@@ -7609,7 +7566,7 @@
           <p:cNvPr id="3" name="Picture 2">
             <a:extLst>
               <a:ext uri="{FF2B5EF4-FFF2-40B4-BE49-F238E27FC236}">
-                <a16:creationId xmlns:a16="http://schemas.microsoft.com/office/drawing/2014/main" id="{F4534869-18FB-F8CF-4CE0-30D78CAAE0F1}"/>
+                <a16:creationId xmlns:a16="http://schemas.microsoft.com/office/drawing/2014/main" id="{10EBA9A2-F894-2989-2B93-A95D6AD68BC9}"/>
               </a:ext>
             </a:extLst>
           </p:cNvPr>
@@ -7626,8 +7583,8 @@
         </p:blipFill>
         <p:spPr>
           <a:xfrm>
-            <a:off x="344169" y="1584960"/>
-            <a:ext cx="4269137" cy="838200"/>
+            <a:off x="5334765" y="1251278"/>
+            <a:ext cx="5586049" cy="3836381"/>
           </a:xfrm>
           <a:prstGeom prst="rect">
             <a:avLst/>
@@ -7659,42 +7616,52 @@
           <a:chExt cx="0" cy="0"/>
         </a:xfrm>
       </p:grpSpPr>
+      <p:sp>
+        <p:nvSpPr>
+          <p:cNvPr id="637" name="Basic plotting and visualizing of results"/>
+          <p:cNvSpPr txBox="1"/>
+          <p:nvPr/>
+        </p:nvSpPr>
+        <p:spPr>
+          <a:xfrm>
+            <a:off x="3154313" y="337961"/>
+            <a:ext cx="4973477" cy="420628"/>
+          </a:xfrm>
+          <a:prstGeom prst="rect">
+            <a:avLst/>
+          </a:prstGeom>
+          <a:ln w="12700">
+            <a:miter lim="400000"/>
+          </a:ln>
+          <a:extLst>
+            <a:ext uri="{C572A759-6A51-4108-AA02-DFA0A04FC94B}">
+              <ma14:wrappingTextBoxFlag xmlns="" xmlns:m="http://schemas.openxmlformats.org/officeDocument/2006/math" xmlns:a14="http://schemas.microsoft.com/office/drawing/2010/main" xmlns:ma14="http://schemas.microsoft.com/office/mac/drawingml/2011/main" val="1"/>
+            </a:ext>
+          </a:extLst>
+        </p:spPr>
+        <p:txBody>
+          <a:bodyPr wrap="none" lIns="25400" tIns="25400" rIns="25400" bIns="25400" anchor="ctr">
+            <a:spAutoFit/>
+          </a:bodyPr>
+          <a:lstStyle>
+            <a:lvl1pPr>
+              <a:defRPr sz="4800" b="1"/>
+            </a:lvl1pPr>
+          </a:lstStyle>
+          <a:p>
+            <a:r>
+              <a:rPr sz="2400"/>
+              <a:t>Basic plotting and visualizing of results</a:t>
+            </a:r>
+          </a:p>
+        </p:txBody>
+      </p:sp>
       <p:pic>
         <p:nvPicPr>
           <p:cNvPr id="2" name="Picture 1">
             <a:extLst>
               <a:ext uri="{FF2B5EF4-FFF2-40B4-BE49-F238E27FC236}">
-                <a16:creationId xmlns:a16="http://schemas.microsoft.com/office/drawing/2014/main" id="{41522347-7DD1-8CF1-337B-C68BA239CB73}"/>
-              </a:ext>
-            </a:extLst>
-          </p:cNvPr>
-          <p:cNvPicPr>
-            <a:picLocks noChangeAspect="1"/>
-          </p:cNvPicPr>
-          <p:nvPr/>
-        </p:nvPicPr>
-        <p:blipFill>
-          <a:blip r:embed="rId2"/>
-          <a:stretch>
-            <a:fillRect/>
-          </a:stretch>
-        </p:blipFill>
-        <p:spPr>
-          <a:xfrm>
-            <a:off x="198120" y="521959"/>
-            <a:ext cx="6019800" cy="666916"/>
-          </a:xfrm>
-          <a:prstGeom prst="rect">
-            <a:avLst/>
-          </a:prstGeom>
-        </p:spPr>
-      </p:pic>
-      <p:pic>
-        <p:nvPicPr>
-          <p:cNvPr id="3" name="Picture 2">
-            <a:extLst>
-              <a:ext uri="{FF2B5EF4-FFF2-40B4-BE49-F238E27FC236}">
-                <a16:creationId xmlns:a16="http://schemas.microsoft.com/office/drawing/2014/main" id="{89A7CA8A-8010-FDE2-B2E4-A7DF48639E5C}"/>
+                <a16:creationId xmlns:a16="http://schemas.microsoft.com/office/drawing/2014/main" id="{AE285BDD-5369-A9B0-960F-93FFE3F9BDAF}"/>
               </a:ext>
             </a:extLst>
           </p:cNvPr>
@@ -7711,8 +7678,38 @@
         </p:blipFill>
         <p:spPr>
           <a:xfrm>
-            <a:off x="6817723" y="526090"/>
-            <a:ext cx="4620758" cy="4430864"/>
+            <a:off x="4872992" y="1376677"/>
+            <a:ext cx="6316980" cy="4104645"/>
+          </a:xfrm>
+          <a:prstGeom prst="rect">
+            <a:avLst/>
+          </a:prstGeom>
+        </p:spPr>
+      </p:pic>
+      <p:pic>
+        <p:nvPicPr>
+          <p:cNvPr id="3" name="Picture 2">
+            <a:extLst>
+              <a:ext uri="{FF2B5EF4-FFF2-40B4-BE49-F238E27FC236}">
+                <a16:creationId xmlns:a16="http://schemas.microsoft.com/office/drawing/2014/main" id="{F4534869-18FB-F8CF-4CE0-30D78CAAE0F1}"/>
+              </a:ext>
+            </a:extLst>
+          </p:cNvPr>
+          <p:cNvPicPr>
+            <a:picLocks noChangeAspect="1"/>
+          </p:cNvPicPr>
+          <p:nvPr/>
+        </p:nvPicPr>
+        <p:blipFill>
+          <a:blip r:embed="rId4"/>
+          <a:stretch>
+            <a:fillRect/>
+          </a:stretch>
+        </p:blipFill>
+        <p:spPr>
+          <a:xfrm>
+            <a:off x="344169" y="1584960"/>
+            <a:ext cx="4269137" cy="838200"/>
           </a:xfrm>
           <a:prstGeom prst="rect">
             <a:avLst/>
@@ -7720,11 +7717,6 @@
         </p:spPr>
       </p:pic>
     </p:spTree>
-    <p:extLst>
-      <p:ext uri="{BB962C8B-B14F-4D97-AF65-F5344CB8AC3E}">
-        <p14:creationId xmlns:p14="http://schemas.microsoft.com/office/powerpoint/2010/main" val="481012015"/>
-      </p:ext>
-    </p:extLst>
   </p:cSld>
   <p:clrMapOvr>
     <a:masterClrMapping/>
@@ -7754,7 +7746,7 @@
           <p:cNvPr id="2" name="Picture 1">
             <a:extLst>
               <a:ext uri="{FF2B5EF4-FFF2-40B4-BE49-F238E27FC236}">
-                <a16:creationId xmlns:a16="http://schemas.microsoft.com/office/drawing/2014/main" id="{6396EF81-8F76-0B15-E73E-38AA89BEDB0F}"/>
+                <a16:creationId xmlns:a16="http://schemas.microsoft.com/office/drawing/2014/main" id="{41522347-7DD1-8CF1-337B-C68BA239CB73}"/>
               </a:ext>
             </a:extLst>
           </p:cNvPr>
@@ -7771,8 +7763,8 @@
         </p:blipFill>
         <p:spPr>
           <a:xfrm>
-            <a:off x="297180" y="641882"/>
-            <a:ext cx="6637020" cy="296239"/>
+            <a:off x="198120" y="521959"/>
+            <a:ext cx="6019800" cy="666916"/>
           </a:xfrm>
           <a:prstGeom prst="rect">
             <a:avLst/>
@@ -7784,7 +7776,7 @@
           <p:cNvPr id="3" name="Picture 2">
             <a:extLst>
               <a:ext uri="{FF2B5EF4-FFF2-40B4-BE49-F238E27FC236}">
-                <a16:creationId xmlns:a16="http://schemas.microsoft.com/office/drawing/2014/main" id="{E1C5D49F-3882-8939-0AD0-B0C5BB1681BF}"/>
+                <a16:creationId xmlns:a16="http://schemas.microsoft.com/office/drawing/2014/main" id="{89A7CA8A-8010-FDE2-B2E4-A7DF48639E5C}"/>
               </a:ext>
             </a:extLst>
           </p:cNvPr>
@@ -7801,8 +7793,8 @@
         </p:blipFill>
         <p:spPr>
           <a:xfrm>
-            <a:off x="6024879" y="1059180"/>
-            <a:ext cx="5483725" cy="4978399"/>
+            <a:off x="6817723" y="526090"/>
+            <a:ext cx="4620758" cy="4430864"/>
           </a:xfrm>
           <a:prstGeom prst="rect">
             <a:avLst/>
@@ -7812,7 +7804,7 @@
     </p:spTree>
     <p:extLst>
       <p:ext uri="{BB962C8B-B14F-4D97-AF65-F5344CB8AC3E}">
-        <p14:creationId xmlns:p14="http://schemas.microsoft.com/office/powerpoint/2010/main" val="2486804009"/>
+        <p14:creationId xmlns:p14="http://schemas.microsoft.com/office/powerpoint/2010/main" val="481012015"/>
       </p:ext>
     </p:extLst>
   </p:cSld>
@@ -7839,47 +7831,12 @@
           <a:chExt cx="0" cy="0"/>
         </a:xfrm>
       </p:grpSpPr>
-      <p:sp>
-        <p:nvSpPr>
-          <p:cNvPr id="2" name="TextBox 1">
-            <a:extLst>
-              <a:ext uri="{FF2B5EF4-FFF2-40B4-BE49-F238E27FC236}">
-                <a16:creationId xmlns:a16="http://schemas.microsoft.com/office/drawing/2014/main" id="{1E3B3B92-5C9B-7519-2099-66FF1604B0E1}"/>
-              </a:ext>
-            </a:extLst>
-          </p:cNvPr>
-          <p:cNvSpPr txBox="1"/>
-          <p:nvPr/>
-        </p:nvSpPr>
-        <p:spPr>
-          <a:xfrm>
-            <a:off x="4846320" y="205740"/>
-            <a:ext cx="4853940" cy="369332"/>
-          </a:xfrm>
-          <a:prstGeom prst="rect">
-            <a:avLst/>
-          </a:prstGeom>
-          <a:noFill/>
-        </p:spPr>
-        <p:txBody>
-          <a:bodyPr wrap="square" rtlCol="0">
-            <a:spAutoFit/>
-          </a:bodyPr>
-          <a:lstStyle/>
-          <a:p>
-            <a:r>
-              <a:rPr lang="en-US" dirty="0"/>
-              <a:t>Enrichment - GSEA</a:t>
-            </a:r>
-          </a:p>
-        </p:txBody>
-      </p:sp>
       <p:pic>
         <p:nvPicPr>
-          <p:cNvPr id="3" name="Picture 2">
-            <a:extLst>
-              <a:ext uri="{FF2B5EF4-FFF2-40B4-BE49-F238E27FC236}">
-                <a16:creationId xmlns:a16="http://schemas.microsoft.com/office/drawing/2014/main" id="{A7F2F6DC-5714-1330-C4A5-297299F772F0}"/>
+          <p:cNvPr id="2" name="Picture 1">
+            <a:extLst>
+              <a:ext uri="{FF2B5EF4-FFF2-40B4-BE49-F238E27FC236}">
+                <a16:creationId xmlns:a16="http://schemas.microsoft.com/office/drawing/2014/main" id="{6396EF81-8F76-0B15-E73E-38AA89BEDB0F}"/>
               </a:ext>
             </a:extLst>
           </p:cNvPr>
@@ -7896,8 +7853,8 @@
         </p:blipFill>
         <p:spPr>
           <a:xfrm>
-            <a:off x="1157411" y="1173480"/>
-            <a:ext cx="3804899" cy="4114800"/>
+            <a:off x="297180" y="641882"/>
+            <a:ext cx="6637020" cy="296239"/>
           </a:xfrm>
           <a:prstGeom prst="rect">
             <a:avLst/>
@@ -7906,10 +7863,10 @@
       </p:pic>
       <p:pic>
         <p:nvPicPr>
-          <p:cNvPr id="4" name="Picture 3">
-            <a:extLst>
-              <a:ext uri="{FF2B5EF4-FFF2-40B4-BE49-F238E27FC236}">
-                <a16:creationId xmlns:a16="http://schemas.microsoft.com/office/drawing/2014/main" id="{89C141EC-7BF1-CC65-2686-1D57FE322140}"/>
+          <p:cNvPr id="3" name="Picture 2">
+            <a:extLst>
+              <a:ext uri="{FF2B5EF4-FFF2-40B4-BE49-F238E27FC236}">
+                <a16:creationId xmlns:a16="http://schemas.microsoft.com/office/drawing/2014/main" id="{E1C5D49F-3882-8939-0AD0-B0C5BB1681BF}"/>
               </a:ext>
             </a:extLst>
           </p:cNvPr>
@@ -7926,68 +7883,8 @@
         </p:blipFill>
         <p:spPr>
           <a:xfrm>
-            <a:off x="5440680" y="803262"/>
-            <a:ext cx="4617720" cy="509151"/>
-          </a:xfrm>
-          <a:prstGeom prst="rect">
-            <a:avLst/>
-          </a:prstGeom>
-        </p:spPr>
-      </p:pic>
-      <p:pic>
-        <p:nvPicPr>
-          <p:cNvPr id="5" name="Picture 4">
-            <a:extLst>
-              <a:ext uri="{FF2B5EF4-FFF2-40B4-BE49-F238E27FC236}">
-                <a16:creationId xmlns:a16="http://schemas.microsoft.com/office/drawing/2014/main" id="{859A6AFF-2B48-B4E6-0BB8-DEADB6B46F8B}"/>
-              </a:ext>
-            </a:extLst>
-          </p:cNvPr>
-          <p:cNvPicPr>
-            <a:picLocks noChangeAspect="1"/>
-          </p:cNvPicPr>
-          <p:nvPr/>
-        </p:nvPicPr>
-        <p:blipFill>
-          <a:blip r:embed="rId4"/>
-          <a:stretch>
-            <a:fillRect/>
-          </a:stretch>
-        </p:blipFill>
-        <p:spPr>
-          <a:xfrm>
-            <a:off x="5417819" y="1384798"/>
-            <a:ext cx="4212143" cy="573542"/>
-          </a:xfrm>
-          <a:prstGeom prst="rect">
-            <a:avLst/>
-          </a:prstGeom>
-        </p:spPr>
-      </p:pic>
-      <p:pic>
-        <p:nvPicPr>
-          <p:cNvPr id="6" name="Picture 5">
-            <a:extLst>
-              <a:ext uri="{FF2B5EF4-FFF2-40B4-BE49-F238E27FC236}">
-                <a16:creationId xmlns:a16="http://schemas.microsoft.com/office/drawing/2014/main" id="{3D25E771-9FEB-C9F5-7380-1C343608A614}"/>
-              </a:ext>
-            </a:extLst>
-          </p:cNvPr>
-          <p:cNvPicPr>
-            <a:picLocks noChangeAspect="1"/>
-          </p:cNvPicPr>
-          <p:nvPr/>
-        </p:nvPicPr>
-        <p:blipFill>
-          <a:blip r:embed="rId5"/>
-          <a:stretch>
-            <a:fillRect/>
-          </a:stretch>
-        </p:blipFill>
-        <p:spPr>
-          <a:xfrm>
-            <a:off x="5440680" y="2367780"/>
-            <a:ext cx="5836920" cy="2590615"/>
+            <a:off x="6024879" y="1059180"/>
+            <a:ext cx="5483725" cy="4978399"/>
           </a:xfrm>
           <a:prstGeom prst="rect">
             <a:avLst/>
@@ -7997,7 +7894,7 @@
     </p:spTree>
     <p:extLst>
       <p:ext uri="{BB962C8B-B14F-4D97-AF65-F5344CB8AC3E}">
-        <p14:creationId xmlns:p14="http://schemas.microsoft.com/office/powerpoint/2010/main" val="581351450"/>
+        <p14:creationId xmlns:p14="http://schemas.microsoft.com/office/powerpoint/2010/main" val="2486804009"/>
       </p:ext>
     </p:extLst>
   </p:cSld>
@@ -8029,7 +7926,7 @@
           <p:cNvPr id="2" name="TextBox 1">
             <a:extLst>
               <a:ext uri="{FF2B5EF4-FFF2-40B4-BE49-F238E27FC236}">
-                <a16:creationId xmlns:a16="http://schemas.microsoft.com/office/drawing/2014/main" id="{243C5B6F-D42F-04F9-1A2F-44619FB719F4}"/>
+                <a16:creationId xmlns:a16="http://schemas.microsoft.com/office/drawing/2014/main" id="{1E3B3B92-5C9B-7519-2099-66FF1604B0E1}"/>
               </a:ext>
             </a:extLst>
           </p:cNvPr>
@@ -8038,8 +7935,8 @@
         </p:nvSpPr>
         <p:spPr>
           <a:xfrm>
-            <a:off x="5585460" y="335280"/>
-            <a:ext cx="1180131" cy="369332"/>
+            <a:off x="4846320" y="205740"/>
+            <a:ext cx="4853940" cy="369332"/>
           </a:xfrm>
           <a:prstGeom prst="rect">
             <a:avLst/>
@@ -8047,14 +7944,14 @@
           <a:noFill/>
         </p:spPr>
         <p:txBody>
-          <a:bodyPr wrap="none" rtlCol="0">
+          <a:bodyPr wrap="square" rtlCol="0">
             <a:spAutoFit/>
           </a:bodyPr>
           <a:lstStyle/>
           <a:p>
             <a:r>
               <a:rPr lang="en-US" dirty="0"/>
-              <a:t>GSEA plot</a:t>
+              <a:t>Enrichment - GSEA</a:t>
             </a:r>
           </a:p>
         </p:txBody>
@@ -8064,7 +7961,7 @@
           <p:cNvPr id="3" name="Picture 2">
             <a:extLst>
               <a:ext uri="{FF2B5EF4-FFF2-40B4-BE49-F238E27FC236}">
-                <a16:creationId xmlns:a16="http://schemas.microsoft.com/office/drawing/2014/main" id="{F411957E-5A6E-90F3-A752-F928BEB2CD5F}"/>
+                <a16:creationId xmlns:a16="http://schemas.microsoft.com/office/drawing/2014/main" id="{A7F2F6DC-5714-1330-C4A5-297299F772F0}"/>
               </a:ext>
             </a:extLst>
           </p:cNvPr>
@@ -8081,7 +7978,7 @@
         </p:blipFill>
         <p:spPr>
           <a:xfrm>
-            <a:off x="883091" y="1066800"/>
+            <a:off x="1157411" y="1173480"/>
             <a:ext cx="3804899" cy="4114800"/>
           </a:xfrm>
           <a:prstGeom prst="rect">
@@ -8094,7 +7991,7 @@
           <p:cNvPr id="4" name="Picture 3">
             <a:extLst>
               <a:ext uri="{FF2B5EF4-FFF2-40B4-BE49-F238E27FC236}">
-                <a16:creationId xmlns:a16="http://schemas.microsoft.com/office/drawing/2014/main" id="{23180AEB-9FD4-EEE0-545F-CFE2994347E1}"/>
+                <a16:creationId xmlns:a16="http://schemas.microsoft.com/office/drawing/2014/main" id="{89C141EC-7BF1-CC65-2686-1D57FE322140}"/>
               </a:ext>
             </a:extLst>
           </p:cNvPr>
@@ -8111,53 +8008,78 @@
         </p:blipFill>
         <p:spPr>
           <a:xfrm>
-            <a:off x="5661660" y="944880"/>
-            <a:ext cx="5556351" cy="4664518"/>
+            <a:off x="5440680" y="803262"/>
+            <a:ext cx="4617720" cy="509151"/>
           </a:xfrm>
           <a:prstGeom prst="rect">
             <a:avLst/>
           </a:prstGeom>
         </p:spPr>
       </p:pic>
-      <p:sp>
-        <p:nvSpPr>
-          <p:cNvPr id="5" name="TextBox 4">
-            <a:extLst>
-              <a:ext uri="{FF2B5EF4-FFF2-40B4-BE49-F238E27FC236}">
-                <a16:creationId xmlns:a16="http://schemas.microsoft.com/office/drawing/2014/main" id="{14F5BFD6-91C3-8E50-BCEB-58A239FC9D7E}"/>
-              </a:ext>
-            </a:extLst>
-          </p:cNvPr>
-          <p:cNvSpPr txBox="1"/>
-          <p:nvPr/>
-        </p:nvSpPr>
-        <p:spPr>
-          <a:xfrm>
-            <a:off x="7391400" y="944880"/>
-            <a:ext cx="3657600" cy="369332"/>
-          </a:xfrm>
-          <a:prstGeom prst="rect">
-            <a:avLst/>
-          </a:prstGeom>
-          <a:noFill/>
-        </p:spPr>
-        <p:txBody>
-          <a:bodyPr wrap="square" rtlCol="0">
-            <a:spAutoFit/>
-          </a:bodyPr>
-          <a:lstStyle/>
-          <a:p>
-            <a:r>
-              <a:rPr lang="en-US" dirty="0"/>
-              <a:t>TNFA Signaling via NFKB</a:t>
-            </a:r>
-          </a:p>
-        </p:txBody>
-      </p:sp>
+      <p:pic>
+        <p:nvPicPr>
+          <p:cNvPr id="5" name="Picture 4">
+            <a:extLst>
+              <a:ext uri="{FF2B5EF4-FFF2-40B4-BE49-F238E27FC236}">
+                <a16:creationId xmlns:a16="http://schemas.microsoft.com/office/drawing/2014/main" id="{859A6AFF-2B48-B4E6-0BB8-DEADB6B46F8B}"/>
+              </a:ext>
+            </a:extLst>
+          </p:cNvPr>
+          <p:cNvPicPr>
+            <a:picLocks noChangeAspect="1"/>
+          </p:cNvPicPr>
+          <p:nvPr/>
+        </p:nvPicPr>
+        <p:blipFill>
+          <a:blip r:embed="rId4"/>
+          <a:stretch>
+            <a:fillRect/>
+          </a:stretch>
+        </p:blipFill>
+        <p:spPr>
+          <a:xfrm>
+            <a:off x="5417819" y="1384798"/>
+            <a:ext cx="4212143" cy="573542"/>
+          </a:xfrm>
+          <a:prstGeom prst="rect">
+            <a:avLst/>
+          </a:prstGeom>
+        </p:spPr>
+      </p:pic>
+      <p:pic>
+        <p:nvPicPr>
+          <p:cNvPr id="6" name="Picture 5">
+            <a:extLst>
+              <a:ext uri="{FF2B5EF4-FFF2-40B4-BE49-F238E27FC236}">
+                <a16:creationId xmlns:a16="http://schemas.microsoft.com/office/drawing/2014/main" id="{3D25E771-9FEB-C9F5-7380-1C343608A614}"/>
+              </a:ext>
+            </a:extLst>
+          </p:cNvPr>
+          <p:cNvPicPr>
+            <a:picLocks noChangeAspect="1"/>
+          </p:cNvPicPr>
+          <p:nvPr/>
+        </p:nvPicPr>
+        <p:blipFill>
+          <a:blip r:embed="rId5"/>
+          <a:stretch>
+            <a:fillRect/>
+          </a:stretch>
+        </p:blipFill>
+        <p:spPr>
+          <a:xfrm>
+            <a:off x="5440680" y="2367780"/>
+            <a:ext cx="5836920" cy="2590615"/>
+          </a:xfrm>
+          <a:prstGeom prst="rect">
+            <a:avLst/>
+          </a:prstGeom>
+        </p:spPr>
+      </p:pic>
     </p:spTree>
     <p:extLst>
       <p:ext uri="{BB962C8B-B14F-4D97-AF65-F5344CB8AC3E}">
-        <p14:creationId xmlns:p14="http://schemas.microsoft.com/office/powerpoint/2010/main" val="1149381364"/>
+        <p14:creationId xmlns:p14="http://schemas.microsoft.com/office/powerpoint/2010/main" val="581351450"/>
       </p:ext>
     </p:extLst>
   </p:cSld>
@@ -8189,7 +8111,7 @@
           <p:cNvPr id="2" name="TextBox 1">
             <a:extLst>
               <a:ext uri="{FF2B5EF4-FFF2-40B4-BE49-F238E27FC236}">
-                <a16:creationId xmlns:a16="http://schemas.microsoft.com/office/drawing/2014/main" id="{F9B4D1FA-BA08-09CF-A1DD-28357848A030}"/>
+                <a16:creationId xmlns:a16="http://schemas.microsoft.com/office/drawing/2014/main" id="{243C5B6F-D42F-04F9-1A2F-44619FB719F4}"/>
               </a:ext>
             </a:extLst>
           </p:cNvPr>
@@ -8198,8 +8120,8 @@
         </p:nvSpPr>
         <p:spPr>
           <a:xfrm>
-            <a:off x="4846320" y="205740"/>
-            <a:ext cx="4853940" cy="369332"/>
+            <a:off x="5585460" y="335280"/>
+            <a:ext cx="1180131" cy="369332"/>
           </a:xfrm>
           <a:prstGeom prst="rect">
             <a:avLst/>
@@ -8207,14 +8129,14 @@
           <a:noFill/>
         </p:spPr>
         <p:txBody>
-          <a:bodyPr wrap="square" rtlCol="0">
+          <a:bodyPr wrap="none" rtlCol="0">
             <a:spAutoFit/>
           </a:bodyPr>
           <a:lstStyle/>
           <a:p>
             <a:r>
               <a:rPr lang="en-US" dirty="0"/>
-              <a:t>Enrichment - enricher</a:t>
+              <a:t>GSEA plot</a:t>
             </a:r>
           </a:p>
         </p:txBody>
@@ -8224,7 +8146,7 @@
           <p:cNvPr id="3" name="Picture 2">
             <a:extLst>
               <a:ext uri="{FF2B5EF4-FFF2-40B4-BE49-F238E27FC236}">
-                <a16:creationId xmlns:a16="http://schemas.microsoft.com/office/drawing/2014/main" id="{64CF129B-FE32-0426-939D-4BC03E6B6173}"/>
+                <a16:creationId xmlns:a16="http://schemas.microsoft.com/office/drawing/2014/main" id="{F411957E-5A6E-90F3-A752-F928BEB2CD5F}"/>
               </a:ext>
             </a:extLst>
           </p:cNvPr>
@@ -8241,8 +8163,8 @@
         </p:blipFill>
         <p:spPr>
           <a:xfrm>
-            <a:off x="566420" y="896620"/>
-            <a:ext cx="2481580" cy="913104"/>
+            <a:off x="883091" y="1066800"/>
+            <a:ext cx="3804899" cy="4114800"/>
           </a:xfrm>
           <a:prstGeom prst="rect">
             <a:avLst/>
@@ -8254,7 +8176,7 @@
           <p:cNvPr id="4" name="Picture 3">
             <a:extLst>
               <a:ext uri="{FF2B5EF4-FFF2-40B4-BE49-F238E27FC236}">
-                <a16:creationId xmlns:a16="http://schemas.microsoft.com/office/drawing/2014/main" id="{2445D7C9-03E4-E517-B2D5-5C82F5AA1B2E}"/>
+                <a16:creationId xmlns:a16="http://schemas.microsoft.com/office/drawing/2014/main" id="{23180AEB-9FD4-EEE0-545F-CFE2994347E1}"/>
               </a:ext>
             </a:extLst>
           </p:cNvPr>
@@ -8271,48 +8193,53 @@
         </p:blipFill>
         <p:spPr>
           <a:xfrm>
-            <a:off x="5821680" y="1036319"/>
-            <a:ext cx="5181872" cy="4205577"/>
+            <a:off x="5661660" y="944880"/>
+            <a:ext cx="5556351" cy="4664518"/>
           </a:xfrm>
           <a:prstGeom prst="rect">
             <a:avLst/>
           </a:prstGeom>
         </p:spPr>
       </p:pic>
-      <p:pic>
-        <p:nvPicPr>
-          <p:cNvPr id="5" name="Picture 4">
-            <a:extLst>
-              <a:ext uri="{FF2B5EF4-FFF2-40B4-BE49-F238E27FC236}">
-                <a16:creationId xmlns:a16="http://schemas.microsoft.com/office/drawing/2014/main" id="{C4D97334-C8DB-CB95-AD9A-B0F1CEEAF9DE}"/>
-              </a:ext>
-            </a:extLst>
-          </p:cNvPr>
-          <p:cNvPicPr>
-            <a:picLocks noChangeAspect="1"/>
-          </p:cNvPicPr>
-          <p:nvPr/>
-        </p:nvPicPr>
-        <p:blipFill>
-          <a:blip r:embed="rId4"/>
-          <a:stretch>
-            <a:fillRect/>
-          </a:stretch>
-        </p:blipFill>
-        <p:spPr>
-          <a:xfrm>
-            <a:off x="384810" y="2503623"/>
-            <a:ext cx="5326380" cy="1703325"/>
-          </a:xfrm>
-          <a:prstGeom prst="rect">
-            <a:avLst/>
-          </a:prstGeom>
-        </p:spPr>
-      </p:pic>
+      <p:sp>
+        <p:nvSpPr>
+          <p:cNvPr id="5" name="TextBox 4">
+            <a:extLst>
+              <a:ext uri="{FF2B5EF4-FFF2-40B4-BE49-F238E27FC236}">
+                <a16:creationId xmlns:a16="http://schemas.microsoft.com/office/drawing/2014/main" id="{14F5BFD6-91C3-8E50-BCEB-58A239FC9D7E}"/>
+              </a:ext>
+            </a:extLst>
+          </p:cNvPr>
+          <p:cNvSpPr txBox="1"/>
+          <p:nvPr/>
+        </p:nvSpPr>
+        <p:spPr>
+          <a:xfrm>
+            <a:off x="7391400" y="944880"/>
+            <a:ext cx="3657600" cy="369332"/>
+          </a:xfrm>
+          <a:prstGeom prst="rect">
+            <a:avLst/>
+          </a:prstGeom>
+          <a:noFill/>
+        </p:spPr>
+        <p:txBody>
+          <a:bodyPr wrap="square" rtlCol="0">
+            <a:spAutoFit/>
+          </a:bodyPr>
+          <a:lstStyle/>
+          <a:p>
+            <a:r>
+              <a:rPr lang="en-US" dirty="0"/>
+              <a:t>TNFA Signaling via NFKB</a:t>
+            </a:r>
+          </a:p>
+        </p:txBody>
+      </p:sp>
     </p:spTree>
     <p:extLst>
       <p:ext uri="{BB962C8B-B14F-4D97-AF65-F5344CB8AC3E}">
-        <p14:creationId xmlns:p14="http://schemas.microsoft.com/office/powerpoint/2010/main" val="598439181"/>
+        <p14:creationId xmlns:p14="http://schemas.microsoft.com/office/powerpoint/2010/main" val="1149381364"/>
       </p:ext>
     </p:extLst>
   </p:cSld>
@@ -8344,6 +8271,161 @@
           <p:cNvPr id="2" name="TextBox 1">
             <a:extLst>
               <a:ext uri="{FF2B5EF4-FFF2-40B4-BE49-F238E27FC236}">
+                <a16:creationId xmlns:a16="http://schemas.microsoft.com/office/drawing/2014/main" id="{F9B4D1FA-BA08-09CF-A1DD-28357848A030}"/>
+              </a:ext>
+            </a:extLst>
+          </p:cNvPr>
+          <p:cNvSpPr txBox="1"/>
+          <p:nvPr/>
+        </p:nvSpPr>
+        <p:spPr>
+          <a:xfrm>
+            <a:off x="4846320" y="205740"/>
+            <a:ext cx="4853940" cy="369332"/>
+          </a:xfrm>
+          <a:prstGeom prst="rect">
+            <a:avLst/>
+          </a:prstGeom>
+          <a:noFill/>
+        </p:spPr>
+        <p:txBody>
+          <a:bodyPr wrap="square" rtlCol="0">
+            <a:spAutoFit/>
+          </a:bodyPr>
+          <a:lstStyle/>
+          <a:p>
+            <a:r>
+              <a:rPr lang="en-US" dirty="0"/>
+              <a:t>Enrichment - enricher</a:t>
+            </a:r>
+          </a:p>
+        </p:txBody>
+      </p:sp>
+      <p:pic>
+        <p:nvPicPr>
+          <p:cNvPr id="3" name="Picture 2">
+            <a:extLst>
+              <a:ext uri="{FF2B5EF4-FFF2-40B4-BE49-F238E27FC236}">
+                <a16:creationId xmlns:a16="http://schemas.microsoft.com/office/drawing/2014/main" id="{64CF129B-FE32-0426-939D-4BC03E6B6173}"/>
+              </a:ext>
+            </a:extLst>
+          </p:cNvPr>
+          <p:cNvPicPr>
+            <a:picLocks noChangeAspect="1"/>
+          </p:cNvPicPr>
+          <p:nvPr/>
+        </p:nvPicPr>
+        <p:blipFill>
+          <a:blip r:embed="rId2"/>
+          <a:stretch>
+            <a:fillRect/>
+          </a:stretch>
+        </p:blipFill>
+        <p:spPr>
+          <a:xfrm>
+            <a:off x="566420" y="896620"/>
+            <a:ext cx="2481580" cy="913104"/>
+          </a:xfrm>
+          <a:prstGeom prst="rect">
+            <a:avLst/>
+          </a:prstGeom>
+        </p:spPr>
+      </p:pic>
+      <p:pic>
+        <p:nvPicPr>
+          <p:cNvPr id="4" name="Picture 3">
+            <a:extLst>
+              <a:ext uri="{FF2B5EF4-FFF2-40B4-BE49-F238E27FC236}">
+                <a16:creationId xmlns:a16="http://schemas.microsoft.com/office/drawing/2014/main" id="{2445D7C9-03E4-E517-B2D5-5C82F5AA1B2E}"/>
+              </a:ext>
+            </a:extLst>
+          </p:cNvPr>
+          <p:cNvPicPr>
+            <a:picLocks noChangeAspect="1"/>
+          </p:cNvPicPr>
+          <p:nvPr/>
+        </p:nvPicPr>
+        <p:blipFill>
+          <a:blip r:embed="rId3"/>
+          <a:stretch>
+            <a:fillRect/>
+          </a:stretch>
+        </p:blipFill>
+        <p:spPr>
+          <a:xfrm>
+            <a:off x="5821680" y="1036319"/>
+            <a:ext cx="5181872" cy="4205577"/>
+          </a:xfrm>
+          <a:prstGeom prst="rect">
+            <a:avLst/>
+          </a:prstGeom>
+        </p:spPr>
+      </p:pic>
+      <p:pic>
+        <p:nvPicPr>
+          <p:cNvPr id="5" name="Picture 4">
+            <a:extLst>
+              <a:ext uri="{FF2B5EF4-FFF2-40B4-BE49-F238E27FC236}">
+                <a16:creationId xmlns:a16="http://schemas.microsoft.com/office/drawing/2014/main" id="{C4D97334-C8DB-CB95-AD9A-B0F1CEEAF9DE}"/>
+              </a:ext>
+            </a:extLst>
+          </p:cNvPr>
+          <p:cNvPicPr>
+            <a:picLocks noChangeAspect="1"/>
+          </p:cNvPicPr>
+          <p:nvPr/>
+        </p:nvPicPr>
+        <p:blipFill>
+          <a:blip r:embed="rId4"/>
+          <a:stretch>
+            <a:fillRect/>
+          </a:stretch>
+        </p:blipFill>
+        <p:spPr>
+          <a:xfrm>
+            <a:off x="384810" y="2503623"/>
+            <a:ext cx="5326380" cy="1703325"/>
+          </a:xfrm>
+          <a:prstGeom prst="rect">
+            <a:avLst/>
+          </a:prstGeom>
+        </p:spPr>
+      </p:pic>
+    </p:spTree>
+    <p:extLst>
+      <p:ext uri="{BB962C8B-B14F-4D97-AF65-F5344CB8AC3E}">
+        <p14:creationId xmlns:p14="http://schemas.microsoft.com/office/powerpoint/2010/main" val="598439181"/>
+      </p:ext>
+    </p:extLst>
+  </p:cSld>
+  <p:clrMapOvr>
+    <a:masterClrMapping/>
+  </p:clrMapOvr>
+</p:sld>
+</file>
+
+<file path=ppt/slides/slide28.xml><?xml version="1.0" encoding="utf-8"?>
+<p:sld xmlns:a="http://schemas.openxmlformats.org/drawingml/2006/main" xmlns:r="http://schemas.openxmlformats.org/officeDocument/2006/relationships" xmlns:p="http://schemas.openxmlformats.org/presentationml/2006/main">
+  <p:cSld>
+    <p:spTree>
+      <p:nvGrpSpPr>
+        <p:cNvPr id="1" name=""/>
+        <p:cNvGrpSpPr/>
+        <p:nvPr/>
+      </p:nvGrpSpPr>
+      <p:grpSpPr>
+        <a:xfrm>
+          <a:off x="0" y="0"/>
+          <a:ext cx="0" cy="0"/>
+          <a:chOff x="0" y="0"/>
+          <a:chExt cx="0" cy="0"/>
+        </a:xfrm>
+      </p:grpSpPr>
+      <p:sp>
+        <p:nvSpPr>
+          <p:cNvPr id="2" name="TextBox 1">
+            <a:extLst>
+              <a:ext uri="{FF2B5EF4-FFF2-40B4-BE49-F238E27FC236}">
                 <a16:creationId xmlns:a16="http://schemas.microsoft.com/office/drawing/2014/main" id="{A396A0CB-A2F5-11C0-37AF-D60D8A089837}"/>
               </a:ext>
             </a:extLst>
@@ -8517,7 +8599,7 @@
 </p:sld>
 </file>
 
-<file path=ppt/slides/slide28.xml><?xml version="1.0" encoding="utf-8"?>
+<file path=ppt/slides/slide29.xml><?xml version="1.0" encoding="utf-8"?>
 <p:sld xmlns:a="http://schemas.openxmlformats.org/drawingml/2006/main" xmlns:r="http://schemas.openxmlformats.org/officeDocument/2006/relationships" xmlns:p="http://schemas.openxmlformats.org/presentationml/2006/main" show="0">
   <p:cSld>
     <p:spTree>
@@ -8700,7 +8782,7 @@
           </a:ln>
           <a:extLst>
             <a:ext uri="{C572A759-6A51-4108-AA02-DFA0A04FC94B}">
-              <ma14:wrappingTextBoxFlag xmlns:ma14="http://schemas.microsoft.com/office/mac/drawingml/2011/main" xmlns:a14="http://schemas.microsoft.com/office/drawing/2010/main" xmlns:m="http://schemas.openxmlformats.org/officeDocument/2006/math" xmlns="" val="1"/>
+              <ma14:wrappingTextBoxFlag xmlns="" xmlns:m="http://schemas.openxmlformats.org/officeDocument/2006/math" xmlns:a14="http://schemas.microsoft.com/office/drawing/2010/main" xmlns:ma14="http://schemas.microsoft.com/office/mac/drawingml/2011/main" val="1"/>
             </a:ext>
           </a:extLst>
         </p:spPr>
@@ -8928,7 +9010,7 @@
           </a:ln>
           <a:extLst>
             <a:ext uri="{C572A759-6A51-4108-AA02-DFA0A04FC94B}">
-              <ma14:wrappingTextBoxFlag xmlns:ma14="http://schemas.microsoft.com/office/mac/drawingml/2011/main" xmlns:a14="http://schemas.microsoft.com/office/drawing/2010/main" xmlns:m="http://schemas.openxmlformats.org/officeDocument/2006/math" xmlns="" val="1"/>
+              <ma14:wrappingTextBoxFlag xmlns="" xmlns:m="http://schemas.openxmlformats.org/officeDocument/2006/math" xmlns:a14="http://schemas.microsoft.com/office/drawing/2010/main" xmlns:ma14="http://schemas.microsoft.com/office/mac/drawingml/2011/main" val="1"/>
             </a:ext>
           </a:extLst>
         </p:spPr>
@@ -8976,7 +9058,7 @@
           </a:ln>
           <a:extLst>
             <a:ext uri="{C572A759-6A51-4108-AA02-DFA0A04FC94B}">
-              <ma14:wrappingTextBoxFlag xmlns:ma14="http://schemas.microsoft.com/office/mac/drawingml/2011/main" xmlns:a14="http://schemas.microsoft.com/office/drawing/2010/main" xmlns:m="http://schemas.openxmlformats.org/officeDocument/2006/math" xmlns="" val="1"/>
+              <ma14:wrappingTextBoxFlag xmlns="" xmlns:m="http://schemas.openxmlformats.org/officeDocument/2006/math" xmlns:a14="http://schemas.microsoft.com/office/drawing/2010/main" xmlns:ma14="http://schemas.microsoft.com/office/mac/drawingml/2011/main" val="1"/>
             </a:ext>
           </a:extLst>
         </p:spPr>
@@ -9132,7 +9214,7 @@
           </a:ln>
           <a:extLst>
             <a:ext uri="{C572A759-6A51-4108-AA02-DFA0A04FC94B}">
-              <ma14:wrappingTextBoxFlag xmlns="" xmlns:m="http://schemas.openxmlformats.org/officeDocument/2006/math" xmlns:a14="http://schemas.microsoft.com/office/drawing/2010/main" xmlns:ma14="http://schemas.microsoft.com/office/mac/drawingml/2011/main" val="1"/>
+              <ma14:wrappingTextBoxFlag xmlns:ma14="http://schemas.microsoft.com/office/mac/drawingml/2011/main" xmlns:a14="http://schemas.microsoft.com/office/drawing/2010/main" xmlns:m="http://schemas.openxmlformats.org/officeDocument/2006/math" xmlns="" val="1"/>
             </a:ext>
           </a:extLst>
         </p:spPr>
@@ -9180,7 +9262,7 @@
           </a:ln>
           <a:extLst>
             <a:ext uri="{C572A759-6A51-4108-AA02-DFA0A04FC94B}">
-              <ma14:wrappingTextBoxFlag xmlns="" xmlns:m="http://schemas.openxmlformats.org/officeDocument/2006/math" xmlns:a14="http://schemas.microsoft.com/office/drawing/2010/main" xmlns:ma14="http://schemas.microsoft.com/office/mac/drawingml/2011/main" val="1"/>
+              <ma14:wrappingTextBoxFlag xmlns:ma14="http://schemas.microsoft.com/office/mac/drawingml/2011/main" xmlns:a14="http://schemas.microsoft.com/office/drawing/2010/main" xmlns:m="http://schemas.openxmlformats.org/officeDocument/2006/math" xmlns="" val="1"/>
             </a:ext>
           </a:extLst>
         </p:spPr>
@@ -9439,7 +9521,7 @@
           </a:ln>
           <a:extLst>
             <a:ext uri="{C572A759-6A51-4108-AA02-DFA0A04FC94B}">
-              <ma14:wrappingTextBoxFlag xmlns:ma14="http://schemas.microsoft.com/office/mac/drawingml/2011/main" xmlns:a14="http://schemas.microsoft.com/office/drawing/2010/main" xmlns:m="http://schemas.openxmlformats.org/officeDocument/2006/math" xmlns="" val="1"/>
+              <ma14:wrappingTextBoxFlag xmlns="" xmlns:m="http://schemas.openxmlformats.org/officeDocument/2006/math" xmlns:a14="http://schemas.microsoft.com/office/drawing/2010/main" xmlns:ma14="http://schemas.microsoft.com/office/mac/drawingml/2011/main" val="1"/>
             </a:ext>
           </a:extLst>
         </p:spPr>
@@ -9479,7 +9561,7 @@
           </a:ln>
           <a:extLst>
             <a:ext uri="{C572A759-6A51-4108-AA02-DFA0A04FC94B}">
-              <ma14:wrappingTextBoxFlag xmlns:ma14="http://schemas.microsoft.com/office/mac/drawingml/2011/main" xmlns:a14="http://schemas.microsoft.com/office/drawing/2010/main" xmlns:m="http://schemas.openxmlformats.org/officeDocument/2006/math" xmlns="" val="1"/>
+              <ma14:wrappingTextBoxFlag xmlns="" xmlns:m="http://schemas.openxmlformats.org/officeDocument/2006/math" xmlns:a14="http://schemas.microsoft.com/office/drawing/2010/main" xmlns:ma14="http://schemas.microsoft.com/office/mac/drawingml/2011/main" val="1"/>
             </a:ext>
           </a:extLst>
         </p:spPr>
@@ -9519,7 +9601,7 @@
           </a:ln>
           <a:extLst>
             <a:ext uri="{C572A759-6A51-4108-AA02-DFA0A04FC94B}">
-              <ma14:wrappingTextBoxFlag xmlns:ma14="http://schemas.microsoft.com/office/mac/drawingml/2011/main" xmlns:a14="http://schemas.microsoft.com/office/drawing/2010/main" xmlns:m="http://schemas.openxmlformats.org/officeDocument/2006/math" xmlns="" val="1"/>
+              <ma14:wrappingTextBoxFlag xmlns="" xmlns:m="http://schemas.openxmlformats.org/officeDocument/2006/math" xmlns:a14="http://schemas.microsoft.com/office/drawing/2010/main" xmlns:ma14="http://schemas.microsoft.com/office/mac/drawingml/2011/main" val="1"/>
             </a:ext>
           </a:extLst>
         </p:spPr>
@@ -9567,7 +9649,7 @@
           </a:ln>
           <a:extLst>
             <a:ext uri="{C572A759-6A51-4108-AA02-DFA0A04FC94B}">
-              <ma14:wrappingTextBoxFlag xmlns:ma14="http://schemas.microsoft.com/office/mac/drawingml/2011/main" xmlns:a14="http://schemas.microsoft.com/office/drawing/2010/main" xmlns:m="http://schemas.openxmlformats.org/officeDocument/2006/math" xmlns="" val="1"/>
+              <ma14:wrappingTextBoxFlag xmlns="" xmlns:m="http://schemas.openxmlformats.org/officeDocument/2006/math" xmlns:a14="http://schemas.microsoft.com/office/drawing/2010/main" xmlns:ma14="http://schemas.microsoft.com/office/mac/drawingml/2011/main" val="1"/>
             </a:ext>
           </a:extLst>
         </p:spPr>
@@ -9663,7 +9745,7 @@
           </a:ln>
           <a:extLst>
             <a:ext uri="{C572A759-6A51-4108-AA02-DFA0A04FC94B}">
-              <ma14:wrappingTextBoxFlag xmlns:ma14="http://schemas.microsoft.com/office/mac/drawingml/2011/main" xmlns:a14="http://schemas.microsoft.com/office/drawing/2010/main" xmlns:m="http://schemas.openxmlformats.org/officeDocument/2006/math" xmlns="" val="1"/>
+              <ma14:wrappingTextBoxFlag xmlns="" xmlns:m="http://schemas.openxmlformats.org/officeDocument/2006/math" xmlns:a14="http://schemas.microsoft.com/office/drawing/2010/main" xmlns:ma14="http://schemas.microsoft.com/office/mac/drawingml/2011/main" val="1"/>
             </a:ext>
           </a:extLst>
         </p:spPr>
@@ -9789,7 +9871,7 @@
           </a:ln>
           <a:extLst>
             <a:ext uri="{C572A759-6A51-4108-AA02-DFA0A04FC94B}">
-              <ma14:wrappingTextBoxFlag xmlns="" xmlns:m="http://schemas.openxmlformats.org/officeDocument/2006/math" xmlns:a14="http://schemas.microsoft.com/office/drawing/2010/main" xmlns:ma14="http://schemas.microsoft.com/office/mac/drawingml/2011/main" val="1"/>
+              <ma14:wrappingTextBoxFlag xmlns:ma14="http://schemas.microsoft.com/office/mac/drawingml/2011/main" xmlns:a14="http://schemas.microsoft.com/office/drawing/2010/main" xmlns:m="http://schemas.openxmlformats.org/officeDocument/2006/math" xmlns="" val="1"/>
             </a:ext>
           </a:extLst>
         </p:spPr>
@@ -10026,7 +10108,7 @@
           </a:ln>
           <a:extLst>
             <a:ext uri="{C572A759-6A51-4108-AA02-DFA0A04FC94B}">
-              <ma14:wrappingTextBoxFlag xmlns:ma14="http://schemas.microsoft.com/office/mac/drawingml/2011/main" xmlns:a14="http://schemas.microsoft.com/office/drawing/2010/main" xmlns:m="http://schemas.openxmlformats.org/officeDocument/2006/math" xmlns="" val="1"/>
+              <ma14:wrappingTextBoxFlag xmlns="" xmlns:m="http://schemas.openxmlformats.org/officeDocument/2006/math" xmlns:a14="http://schemas.microsoft.com/office/drawing/2010/main" xmlns:ma14="http://schemas.microsoft.com/office/mac/drawingml/2011/main" val="1"/>
             </a:ext>
           </a:extLst>
         </p:spPr>
@@ -10066,7 +10148,7 @@
           </a:ln>
           <a:extLst>
             <a:ext uri="{C572A759-6A51-4108-AA02-DFA0A04FC94B}">
-              <ma14:wrappingTextBoxFlag xmlns:ma14="http://schemas.microsoft.com/office/mac/drawingml/2011/main" xmlns:a14="http://schemas.microsoft.com/office/drawing/2010/main" xmlns:m="http://schemas.openxmlformats.org/officeDocument/2006/math" xmlns="" val="1"/>
+              <ma14:wrappingTextBoxFlag xmlns="" xmlns:m="http://schemas.openxmlformats.org/officeDocument/2006/math" xmlns:a14="http://schemas.microsoft.com/office/drawing/2010/main" xmlns:ma14="http://schemas.microsoft.com/office/mac/drawingml/2011/main" val="1"/>
             </a:ext>
           </a:extLst>
         </p:spPr>
@@ -10114,7 +10196,7 @@
           </a:ln>
           <a:extLst>
             <a:ext uri="{C572A759-6A51-4108-AA02-DFA0A04FC94B}">
-              <ma14:wrappingTextBoxFlag xmlns:ma14="http://schemas.microsoft.com/office/mac/drawingml/2011/main" xmlns:a14="http://schemas.microsoft.com/office/drawing/2010/main" xmlns:m="http://schemas.openxmlformats.org/officeDocument/2006/math" xmlns="" val="1"/>
+              <ma14:wrappingTextBoxFlag xmlns="" xmlns:m="http://schemas.openxmlformats.org/officeDocument/2006/math" xmlns:a14="http://schemas.microsoft.com/office/drawing/2010/main" xmlns:ma14="http://schemas.microsoft.com/office/mac/drawingml/2011/main" val="1"/>
             </a:ext>
           </a:extLst>
         </p:spPr>
@@ -10150,7 +10232,7 @@
           </a:ln>
           <a:extLst>
             <a:ext uri="{C572A759-6A51-4108-AA02-DFA0A04FC94B}">
-              <ma14:wrappingTextBoxFlag xmlns:ma14="http://schemas.microsoft.com/office/mac/drawingml/2011/main" xmlns:a14="http://schemas.microsoft.com/office/drawing/2010/main" xmlns:m="http://schemas.openxmlformats.org/officeDocument/2006/math" xmlns="" val="1"/>
+              <ma14:wrappingTextBoxFlag xmlns="" xmlns:m="http://schemas.openxmlformats.org/officeDocument/2006/math" xmlns:a14="http://schemas.microsoft.com/office/drawing/2010/main" xmlns:ma14="http://schemas.microsoft.com/office/mac/drawingml/2011/main" val="1"/>
             </a:ext>
           </a:extLst>
         </p:spPr>
@@ -10190,7 +10272,7 @@
           </a:ln>
           <a:extLst>
             <a:ext uri="{C572A759-6A51-4108-AA02-DFA0A04FC94B}">
-              <ma14:wrappingTextBoxFlag xmlns:ma14="http://schemas.microsoft.com/office/mac/drawingml/2011/main" xmlns:a14="http://schemas.microsoft.com/office/drawing/2010/main" xmlns:m="http://schemas.openxmlformats.org/officeDocument/2006/math" xmlns="" val="1"/>
+              <ma14:wrappingTextBoxFlag xmlns="" xmlns:m="http://schemas.openxmlformats.org/officeDocument/2006/math" xmlns:a14="http://schemas.microsoft.com/office/drawing/2010/main" xmlns:ma14="http://schemas.microsoft.com/office/mac/drawingml/2011/main" val="1"/>
             </a:ext>
           </a:extLst>
         </p:spPr>
@@ -10226,7 +10308,7 @@
           </a:ln>
           <a:extLst>
             <a:ext uri="{C572A759-6A51-4108-AA02-DFA0A04FC94B}">
-              <ma14:wrappingTextBoxFlag xmlns:ma14="http://schemas.microsoft.com/office/mac/drawingml/2011/main" xmlns:a14="http://schemas.microsoft.com/office/drawing/2010/main" xmlns:m="http://schemas.openxmlformats.org/officeDocument/2006/math" xmlns="" val="1"/>
+              <ma14:wrappingTextBoxFlag xmlns="" xmlns:m="http://schemas.openxmlformats.org/officeDocument/2006/math" xmlns:a14="http://schemas.microsoft.com/office/drawing/2010/main" xmlns:ma14="http://schemas.microsoft.com/office/mac/drawingml/2011/main" val="1"/>
             </a:ext>
           </a:extLst>
         </p:spPr>
@@ -10262,7 +10344,7 @@
           </a:ln>
           <a:extLst>
             <a:ext uri="{C572A759-6A51-4108-AA02-DFA0A04FC94B}">
-              <ma14:wrappingTextBoxFlag xmlns:ma14="http://schemas.microsoft.com/office/mac/drawingml/2011/main" xmlns:a14="http://schemas.microsoft.com/office/drawing/2010/main" xmlns:m="http://schemas.openxmlformats.org/officeDocument/2006/math" xmlns="" val="1"/>
+              <ma14:wrappingTextBoxFlag xmlns="" xmlns:m="http://schemas.openxmlformats.org/officeDocument/2006/math" xmlns:a14="http://schemas.microsoft.com/office/drawing/2010/main" xmlns:ma14="http://schemas.microsoft.com/office/mac/drawingml/2011/main" val="1"/>
             </a:ext>
           </a:extLst>
         </p:spPr>
@@ -10330,7 +10412,7 @@
           </a:ln>
           <a:extLst>
             <a:ext uri="{C572A759-6A51-4108-AA02-DFA0A04FC94B}">
-              <ma14:wrappingTextBoxFlag xmlns:ma14="http://schemas.microsoft.com/office/mac/drawingml/2011/main" xmlns:a14="http://schemas.microsoft.com/office/drawing/2010/main" xmlns:m="http://schemas.openxmlformats.org/officeDocument/2006/math" xmlns="" val="1"/>
+              <ma14:wrappingTextBoxFlag xmlns="" xmlns:m="http://schemas.openxmlformats.org/officeDocument/2006/math" xmlns:a14="http://schemas.microsoft.com/office/drawing/2010/main" xmlns:ma14="http://schemas.microsoft.com/office/mac/drawingml/2011/main" val="1"/>
             </a:ext>
           </a:extLst>
         </p:spPr>
@@ -10404,7 +10486,7 @@
           </a:ln>
           <a:extLst>
             <a:ext uri="{C572A759-6A51-4108-AA02-DFA0A04FC94B}">
-              <ma14:wrappingTextBoxFlag xmlns:ma14="http://schemas.microsoft.com/office/mac/drawingml/2011/main" xmlns:a14="http://schemas.microsoft.com/office/drawing/2010/main" xmlns:m="http://schemas.openxmlformats.org/officeDocument/2006/math" xmlns="" val="1"/>
+              <ma14:wrappingTextBoxFlag xmlns="" xmlns:m="http://schemas.openxmlformats.org/officeDocument/2006/math" xmlns:a14="http://schemas.microsoft.com/office/drawing/2010/main" xmlns:ma14="http://schemas.microsoft.com/office/mac/drawingml/2011/main" val="1"/>
             </a:ext>
           </a:extLst>
         </p:spPr>
